--- a/プレゼンテーション.pptx
+++ b/プレゼンテーション.pptx
@@ -5302,30 +5302,22 @@
           </a:p>
           <a:p>
             <a:r>
+              <a:rPr lang="ja-JP" altLang="en-US" sz="2400">
+                <a:solidFill>
+                  <a:srgbClr val="000000"/>
+                </a:solidFill>
+                <a:latin typeface="Gen Interface JP"/>
+              </a:rPr>
+              <a:t>歳出</a:t>
+            </a:r>
+            <a:r>
               <a:rPr lang="ja-JP" altLang="ja-JP" sz="2400">
                 <a:solidFill>
                   <a:srgbClr val="000000"/>
                 </a:solidFill>
                 <a:latin typeface="Gen Interface JP"/>
               </a:rPr>
-              <a:t>経常収支比率（市町村財政）</a:t>
-            </a:r>
-            <a:endParaRPr lang="en-US" altLang="ja-JP" sz="2400" dirty="0">
-              <a:solidFill>
-                <a:srgbClr val="000000"/>
-              </a:solidFill>
-              <a:latin typeface="Gen Interface JP"/>
-            </a:endParaRPr>
-          </a:p>
-          <a:p>
-            <a:r>
-              <a:rPr lang="ja-JP" altLang="ja-JP" sz="2400">
-                <a:solidFill>
-                  <a:srgbClr val="000000"/>
-                </a:solidFill>
-                <a:latin typeface="Gen Interface JP"/>
-              </a:rPr>
-              <a:t>歳入決算総額（市町村財政）</a:t>
+              <a:t>決算総額（市町村財政）</a:t>
             </a:r>
             <a:endParaRPr lang="en-US" altLang="ja-JP" sz="2400" dirty="0">
               <a:solidFill>
@@ -5395,7 +5387,29 @@
               </a:rPr>
               <a:t>第３次産業就業者数</a:t>
             </a:r>
-            <a:endParaRPr kumimoji="1" lang="en-US" altLang="ja-JP" sz="2400" dirty="0"/>
+            <a:endParaRPr lang="en-US" altLang="ja-JP" sz="2400" dirty="0">
+              <a:solidFill>
+                <a:srgbClr val="000000"/>
+              </a:solidFill>
+              <a:latin typeface="Gen Interface JP"/>
+            </a:endParaRPr>
+          </a:p>
+          <a:p>
+            <a:r>
+              <a:rPr lang="ja-JP" altLang="ja-JP" sz="2400">
+                <a:solidFill>
+                  <a:srgbClr val="000000"/>
+                </a:solidFill>
+                <a:latin typeface="Gen Interface JP"/>
+              </a:rPr>
+              <a:t>p15歳未満人口</a:t>
+            </a:r>
+            <a:endParaRPr lang="en-US" altLang="ja-JP" sz="2400" dirty="0">
+              <a:solidFill>
+                <a:srgbClr val="000000"/>
+              </a:solidFill>
+              <a:latin typeface="Gen Interface JP"/>
+            </a:endParaRPr>
           </a:p>
         </p:txBody>
       </p:sp>
@@ -5598,7 +5612,7 @@
                 </a:solidFill>
                 <a:latin typeface="Gen Interface JP"/>
               </a:rPr>
-              <a:t>p15歳未満人口</a:t>
+              <a:t>p65歳以上の世帯員のいる核家族世帯数</a:t>
             </a:r>
             <a:endParaRPr lang="en-US" altLang="ja-JP" sz="2400" dirty="0">
               <a:solidFill>
@@ -5615,7 +5629,7 @@
                 </a:solidFill>
                 <a:latin typeface="Gen Interface JP"/>
               </a:rPr>
-              <a:t>p65歳以上の世帯員のいる核家族世帯数</a:t>
+              <a:t>p従業者数（民営）（卸売業、小売業）p農家数（自給的農家）</a:t>
             </a:r>
             <a:endParaRPr lang="en-US" altLang="ja-JP" sz="2400" dirty="0">
               <a:solidFill>
@@ -5632,7 +5646,7 @@
                 </a:solidFill>
                 <a:latin typeface="Gen Interface JP"/>
               </a:rPr>
-              <a:t>p従業者数（民営）（教育、学習支援業）</a:t>
+              <a:t>p従業者数（民営）（医療、福祉）</a:t>
             </a:r>
             <a:endParaRPr lang="en-US" altLang="ja-JP" sz="2400" dirty="0">
               <a:solidFill>
@@ -5649,7 +5663,7 @@
                 </a:solidFill>
                 <a:latin typeface="Gen Interface JP"/>
               </a:rPr>
-              <a:t>p農家数（自給的農家）</a:t>
+              <a:t>p歳出決算総額（市町村財政）</a:t>
             </a:r>
             <a:endParaRPr lang="en-US" altLang="ja-JP" sz="2400" dirty="0">
               <a:solidFill>
@@ -5837,14 +5851,14 @@
               <a:rPr kumimoji="1" lang="ja-JP" altLang="en-US" sz="3600"/>
               <a:t>である可能性</a:t>
             </a:r>
-            <a:endParaRPr lang="en-US" altLang="ja-JP" sz="3600" dirty="0"/>
+            <a:endParaRPr kumimoji="1" lang="en-US" altLang="ja-JP" dirty="0"/>
           </a:p>
           <a:p>
             <a:pPr marL="0" indent="0">
               <a:buNone/>
             </a:pPr>
             <a:r>
-              <a:rPr lang="en-US" altLang="ja-JP" sz="3200" dirty="0"/>
+              <a:rPr lang="en-US" altLang="ja-JP" dirty="0"/>
               <a:t>	</a:t>
             </a:r>
             <a:r>
@@ -5853,25 +5867,15 @@
             </a:r>
             <a:r>
               <a:rPr kumimoji="1" lang="ja-JP" altLang="en-US"/>
-              <a:t>「経常収支比率」</a:t>
-            </a:r>
-            <a:endParaRPr kumimoji="1" lang="en-US" altLang="ja-JP" dirty="0"/>
-          </a:p>
-          <a:p>
-            <a:pPr marL="0" indent="0">
-              <a:buNone/>
-            </a:pPr>
-            <a:r>
-              <a:rPr lang="en-US" altLang="ja-JP" dirty="0"/>
-              <a:t>	</a:t>
+              <a:t>「</a:t>
             </a:r>
             <a:r>
               <a:rPr lang="ja-JP" altLang="en-US"/>
-              <a:t>・</a:t>
-            </a:r>
-            <a:r>
-              <a:rPr kumimoji="1" lang="ja-JP" altLang="en-US"/>
-              <a:t>「歳入決算総額」</a:t>
+              <a:t>歳出</a:t>
+            </a:r>
+            <a:r>
+              <a:rPr kumimoji="1" lang="ja-JP" altLang="en-US"/>
+              <a:t>決算総額」</a:t>
             </a:r>
             <a:endParaRPr kumimoji="1" lang="en-US" altLang="ja-JP" dirty="0"/>
           </a:p>
@@ -6162,21 +6166,30 @@
                             </p:childTnLst>
                           </p:cTn>
                         </p:par>
+                      </p:childTnLst>
+                    </p:cTn>
+                  </p:par>
+                  <p:par>
+                    <p:cTn id="16" fill="hold">
+                      <p:stCondLst>
+                        <p:cond delay="indefinite"/>
+                      </p:stCondLst>
+                      <p:childTnLst>
                         <p:par>
-                          <p:cTn id="16" fill="hold">
+                          <p:cTn id="17" fill="hold">
                             <p:stCondLst>
-                              <p:cond delay="1500"/>
+                              <p:cond delay="0"/>
                             </p:stCondLst>
                             <p:childTnLst>
                               <p:par>
-                                <p:cTn id="17" presetID="10" presetClass="entr" presetSubtype="0" fill="hold" nodeType="afterEffect">
+                                <p:cTn id="18" presetID="22" presetClass="entr" presetSubtype="8" fill="hold" nodeType="clickEffect">
                                   <p:stCondLst>
                                     <p:cond delay="0"/>
                                   </p:stCondLst>
                                   <p:childTnLst>
                                     <p:set>
                                       <p:cBhvr>
-                                        <p:cTn id="18" dur="1" fill="hold">
+                                        <p:cTn id="19" dur="1" fill="hold">
                                           <p:stCondLst>
                                             <p:cond delay="0"/>
                                           </p:stCondLst>
@@ -6184,7 +6197,7 @@
                                         <p:tgtEl>
                                           <p:spTgt spid="3">
                                             <p:txEl>
-                                              <p:pRg st="3" end="3"/>
+                                              <p:pRg st="4" end="4"/>
                                             </p:txEl>
                                           </p:spTgt>
                                         </p:tgtEl>
@@ -6196,13 +6209,13 @@
                                         <p:strVal val="visible"/>
                                       </p:to>
                                     </p:set>
-                                    <p:animEffect transition="in" filter="fade">
+                                    <p:animEffect transition="in" filter="wipe(left)">
                                       <p:cBhvr>
-                                        <p:cTn id="19" dur="500"/>
+                                        <p:cTn id="20" dur="500"/>
                                         <p:tgtEl>
                                           <p:spTgt spid="3">
                                             <p:txEl>
-                                              <p:pRg st="3" end="3"/>
+                                              <p:pRg st="4" end="4"/>
                                             </p:txEl>
                                           </p:spTgt>
                                         </p:tgtEl>
@@ -6214,23 +6227,14 @@
                             </p:childTnLst>
                           </p:cTn>
                         </p:par>
-                      </p:childTnLst>
-                    </p:cTn>
-                  </p:par>
-                  <p:par>
-                    <p:cTn id="20" fill="hold">
-                      <p:stCondLst>
-                        <p:cond delay="indefinite"/>
-                      </p:stCondLst>
-                      <p:childTnLst>
                         <p:par>
                           <p:cTn id="21" fill="hold">
                             <p:stCondLst>
-                              <p:cond delay="0"/>
+                              <p:cond delay="500"/>
                             </p:stCondLst>
                             <p:childTnLst>
                               <p:par>
-                                <p:cTn id="22" presetID="22" presetClass="entr" presetSubtype="8" fill="hold" nodeType="clickEffect">
+                                <p:cTn id="22" presetID="10" presetClass="entr" presetSubtype="0" fill="hold" nodeType="afterEffect">
                                   <p:stCondLst>
                                     <p:cond delay="0"/>
                                   </p:stCondLst>
@@ -6257,7 +6261,7 @@
                                         <p:strVal val="visible"/>
                                       </p:to>
                                     </p:set>
-                                    <p:animEffect transition="in" filter="wipe(left)">
+                                    <p:animEffect transition="in" filter="fade">
                                       <p:cBhvr>
                                         <p:cTn id="24" dur="500"/>
                                         <p:tgtEl>
@@ -6278,7 +6282,7 @@
                         <p:par>
                           <p:cTn id="25" fill="hold">
                             <p:stCondLst>
-                              <p:cond delay="500"/>
+                              <p:cond delay="1000"/>
                             </p:stCondLst>
                             <p:childTnLst>
                               <p:par>
@@ -6330,7 +6334,7 @@
                         <p:par>
                           <p:cTn id="29" fill="hold">
                             <p:stCondLst>
-                              <p:cond delay="1000"/>
+                              <p:cond delay="1500"/>
                             </p:stCondLst>
                             <p:childTnLst>
                               <p:par>
@@ -6368,58 +6372,6 @@
                                           <p:spTgt spid="3">
                                             <p:txEl>
                                               <p:pRg st="7" end="7"/>
-                                            </p:txEl>
-                                          </p:spTgt>
-                                        </p:tgtEl>
-                                      </p:cBhvr>
-                                    </p:animEffect>
-                                  </p:childTnLst>
-                                </p:cTn>
-                              </p:par>
-                            </p:childTnLst>
-                          </p:cTn>
-                        </p:par>
-                        <p:par>
-                          <p:cTn id="33" fill="hold">
-                            <p:stCondLst>
-                              <p:cond delay="1500"/>
-                            </p:stCondLst>
-                            <p:childTnLst>
-                              <p:par>
-                                <p:cTn id="34" presetID="10" presetClass="entr" presetSubtype="0" fill="hold" nodeType="afterEffect">
-                                  <p:stCondLst>
-                                    <p:cond delay="0"/>
-                                  </p:stCondLst>
-                                  <p:childTnLst>
-                                    <p:set>
-                                      <p:cBhvr>
-                                        <p:cTn id="35" dur="1" fill="hold">
-                                          <p:stCondLst>
-                                            <p:cond delay="0"/>
-                                          </p:stCondLst>
-                                        </p:cTn>
-                                        <p:tgtEl>
-                                          <p:spTgt spid="3">
-                                            <p:txEl>
-                                              <p:pRg st="8" end="8"/>
-                                            </p:txEl>
-                                          </p:spTgt>
-                                        </p:tgtEl>
-                                        <p:attrNameLst>
-                                          <p:attrName>style.visibility</p:attrName>
-                                        </p:attrNameLst>
-                                      </p:cBhvr>
-                                      <p:to>
-                                        <p:strVal val="visible"/>
-                                      </p:to>
-                                    </p:set>
-                                    <p:animEffect transition="in" filter="fade">
-                                      <p:cBhvr>
-                                        <p:cTn id="36" dur="500"/>
-                                        <p:tgtEl>
-                                          <p:spTgt spid="3">
-                                            <p:txEl>
-                                              <p:pRg st="8" end="8"/>
                                             </p:txEl>
                                           </p:spTgt>
                                         </p:tgtEl>
@@ -6542,7 +6494,7 @@
         <p:spPr>
           <a:xfrm>
             <a:off x="838200" y="1825624"/>
-            <a:ext cx="10515600" cy="2781545"/>
+            <a:ext cx="10515600" cy="4667251"/>
           </a:xfrm>
         </p:spPr>
         <p:txBody>
@@ -6644,6 +6596,54 @@
               <a:t>」</a:t>
             </a:r>
             <a:endParaRPr kumimoji="1" lang="en-US" altLang="ja-JP" dirty="0"/>
+          </a:p>
+          <a:p>
+            <a:pPr marL="0" indent="0">
+              <a:buNone/>
+            </a:pPr>
+            <a:endParaRPr lang="en-US" altLang="ja-JP" sz="1400" dirty="0"/>
+          </a:p>
+          <a:p>
+            <a:pPr marL="0" indent="0">
+              <a:buNone/>
+            </a:pPr>
+            <a:r>
+              <a:rPr lang="ja-JP" altLang="en-US" sz="3600"/>
+              <a:t>・核家族化が進んでいる可能性</a:t>
+            </a:r>
+            <a:endParaRPr lang="en-US" altLang="ja-JP" sz="3600" dirty="0"/>
+          </a:p>
+          <a:p>
+            <a:pPr marL="0" indent="0">
+              <a:buNone/>
+            </a:pPr>
+            <a:r>
+              <a:rPr lang="en-US" altLang="ja-JP" dirty="0"/>
+              <a:t>	</a:t>
+            </a:r>
+            <a:r>
+              <a:rPr lang="ja-JP" altLang="en-US"/>
+              <a:t>・「</a:t>
+            </a:r>
+            <a:r>
+              <a:rPr lang="ja-JP" altLang="ja-JP">
+                <a:solidFill>
+                  <a:srgbClr val="000000"/>
+                </a:solidFill>
+                <a:latin typeface="Gen Interface JP"/>
+              </a:rPr>
+              <a:t>p65歳以上の世帯員のいる核家族世帯数</a:t>
+            </a:r>
+            <a:r>
+              <a:rPr lang="ja-JP" altLang="en-US">
+                <a:solidFill>
+                  <a:srgbClr val="000000"/>
+                </a:solidFill>
+                <a:latin typeface="Gen Interface JP"/>
+              </a:rPr>
+              <a:t>」</a:t>
+            </a:r>
+            <a:endParaRPr lang="en-US" altLang="ja-JP" dirty="0"/>
           </a:p>
         </p:txBody>
       </p:sp>
@@ -6877,6 +6877,119 @@
                                           <p:spTgt spid="3">
                                             <p:txEl>
                                               <p:pRg st="4" end="4"/>
+                                            </p:txEl>
+                                          </p:spTgt>
+                                        </p:tgtEl>
+                                      </p:cBhvr>
+                                    </p:animEffect>
+                                  </p:childTnLst>
+                                </p:cTn>
+                              </p:par>
+                            </p:childTnLst>
+                          </p:cTn>
+                        </p:par>
+                      </p:childTnLst>
+                    </p:cTn>
+                  </p:par>
+                  <p:par>
+                    <p:cTn id="21" fill="hold">
+                      <p:stCondLst>
+                        <p:cond delay="indefinite"/>
+                      </p:stCondLst>
+                      <p:childTnLst>
+                        <p:par>
+                          <p:cTn id="22" fill="hold">
+                            <p:stCondLst>
+                              <p:cond delay="0"/>
+                            </p:stCondLst>
+                            <p:childTnLst>
+                              <p:par>
+                                <p:cTn id="23" presetID="22" presetClass="entr" presetSubtype="8" fill="hold" nodeType="clickEffect">
+                                  <p:stCondLst>
+                                    <p:cond delay="0"/>
+                                  </p:stCondLst>
+                                  <p:childTnLst>
+                                    <p:set>
+                                      <p:cBhvr>
+                                        <p:cTn id="24" dur="1" fill="hold">
+                                          <p:stCondLst>
+                                            <p:cond delay="0"/>
+                                          </p:stCondLst>
+                                        </p:cTn>
+                                        <p:tgtEl>
+                                          <p:spTgt spid="3">
+                                            <p:txEl>
+                                              <p:pRg st="6" end="6"/>
+                                            </p:txEl>
+                                          </p:spTgt>
+                                        </p:tgtEl>
+                                        <p:attrNameLst>
+                                          <p:attrName>style.visibility</p:attrName>
+                                        </p:attrNameLst>
+                                      </p:cBhvr>
+                                      <p:to>
+                                        <p:strVal val="visible"/>
+                                      </p:to>
+                                    </p:set>
+                                    <p:animEffect transition="in" filter="wipe(left)">
+                                      <p:cBhvr>
+                                        <p:cTn id="25" dur="500"/>
+                                        <p:tgtEl>
+                                          <p:spTgt spid="3">
+                                            <p:txEl>
+                                              <p:pRg st="6" end="6"/>
+                                            </p:txEl>
+                                          </p:spTgt>
+                                        </p:tgtEl>
+                                      </p:cBhvr>
+                                    </p:animEffect>
+                                  </p:childTnLst>
+                                </p:cTn>
+                              </p:par>
+                            </p:childTnLst>
+                          </p:cTn>
+                        </p:par>
+                        <p:par>
+                          <p:cTn id="26" fill="hold">
+                            <p:stCondLst>
+                              <p:cond delay="500"/>
+                            </p:stCondLst>
+                            <p:childTnLst>
+                              <p:par>
+                                <p:cTn id="27" presetID="10" presetClass="entr" presetSubtype="0" fill="hold" nodeType="afterEffect">
+                                  <p:stCondLst>
+                                    <p:cond delay="0"/>
+                                  </p:stCondLst>
+                                  <p:childTnLst>
+                                    <p:set>
+                                      <p:cBhvr>
+                                        <p:cTn id="28" dur="1" fill="hold">
+                                          <p:stCondLst>
+                                            <p:cond delay="0"/>
+                                          </p:stCondLst>
+                                        </p:cTn>
+                                        <p:tgtEl>
+                                          <p:spTgt spid="3">
+                                            <p:txEl>
+                                              <p:pRg st="7" end="7"/>
+                                            </p:txEl>
+                                          </p:spTgt>
+                                        </p:tgtEl>
+                                        <p:attrNameLst>
+                                          <p:attrName>style.visibility</p:attrName>
+                                        </p:attrNameLst>
+                                      </p:cBhvr>
+                                      <p:to>
+                                        <p:strVal val="visible"/>
+                                      </p:to>
+                                    </p:set>
+                                    <p:animEffect transition="in" filter="fade">
+                                      <p:cBhvr>
+                                        <p:cTn id="29" dur="500"/>
+                                        <p:tgtEl>
+                                          <p:spTgt spid="3">
+                                            <p:txEl>
+                                              <p:pRg st="7" end="7"/>
                                             </p:txEl>
                                           </p:spTgt>
                                         </p:tgtEl>

--- a/プレゼンテーション.pptx
+++ b/プレゼンテーション.pptx
@@ -4407,6 +4407,14 @@
 <file path=ppt/slides/slide11.xml><?xml version="1.0" encoding="utf-8"?>
 <p:sld xmlns:a="http://schemas.openxmlformats.org/drawingml/2006/main" xmlns:r="http://schemas.openxmlformats.org/officeDocument/2006/relationships" xmlns:p="http://schemas.openxmlformats.org/presentationml/2006/main">
   <p:cSld>
+    <p:bg>
+      <p:bgPr>
+        <a:solidFill>
+          <a:schemeClr val="bg1"/>
+        </a:solidFill>
+        <a:effectLst/>
+      </p:bgPr>
+    </p:bg>
     <p:spTree>
       <p:nvGrpSpPr>
         <p:cNvPr id="1" name=""/>
@@ -5897,6 +5905,33 @@
             <a:pPr marL="0" indent="0">
               <a:buNone/>
             </a:pPr>
+            <a:r>
+              <a:rPr lang="en-US" altLang="ja-JP" dirty="0"/>
+              <a:t>	</a:t>
+            </a:r>
+            <a:r>
+              <a:rPr lang="ja-JP" altLang="en-US"/>
+              <a:t>・「人口あたり</a:t>
+            </a:r>
+            <a:r>
+              <a:rPr lang="ja-JP" altLang="ja-JP">
+                <a:solidFill>
+                  <a:srgbClr val="000000"/>
+                </a:solidFill>
+                <a:latin typeface="Gen Interface JP"/>
+              </a:rPr>
+              <a:t>歳出決算総額</a:t>
+            </a:r>
+            <a:r>
+              <a:rPr lang="ja-JP" altLang="en-US"/>
+              <a:t>」</a:t>
+            </a:r>
+            <a:endParaRPr lang="en-US" altLang="ja-JP" dirty="0"/>
+          </a:p>
+          <a:p>
+            <a:pPr marL="0" indent="0">
+              <a:buNone/>
+            </a:pPr>
             <a:endParaRPr lang="en-US" altLang="ja-JP" sz="1400" dirty="0"/>
           </a:p>
           <a:p>
@@ -6166,30 +6201,21 @@
                             </p:childTnLst>
                           </p:cTn>
                         </p:par>
-                      </p:childTnLst>
-                    </p:cTn>
-                  </p:par>
-                  <p:par>
-                    <p:cTn id="16" fill="hold">
-                      <p:stCondLst>
-                        <p:cond delay="indefinite"/>
-                      </p:stCondLst>
-                      <p:childTnLst>
                         <p:par>
-                          <p:cTn id="17" fill="hold">
+                          <p:cTn id="16" fill="hold">
                             <p:stCondLst>
-                              <p:cond delay="0"/>
+                              <p:cond delay="1500"/>
                             </p:stCondLst>
                             <p:childTnLst>
                               <p:par>
-                                <p:cTn id="18" presetID="22" presetClass="entr" presetSubtype="8" fill="hold" nodeType="clickEffect">
+                                <p:cTn id="17" presetID="10" presetClass="entr" presetSubtype="0" fill="hold" nodeType="afterEffect">
                                   <p:stCondLst>
                                     <p:cond delay="0"/>
                                   </p:stCondLst>
                                   <p:childTnLst>
                                     <p:set>
                                       <p:cBhvr>
-                                        <p:cTn id="19" dur="1" fill="hold">
+                                        <p:cTn id="18" dur="1" fill="hold">
                                           <p:stCondLst>
                                             <p:cond delay="0"/>
                                           </p:stCondLst>
@@ -6197,7 +6223,7 @@
                                         <p:tgtEl>
                                           <p:spTgt spid="3">
                                             <p:txEl>
-                                              <p:pRg st="4" end="4"/>
+                                              <p:pRg st="3" end="3"/>
                                             </p:txEl>
                                           </p:spTgt>
                                         </p:tgtEl>
@@ -6209,13 +6235,13 @@
                                         <p:strVal val="visible"/>
                                       </p:to>
                                     </p:set>
-                                    <p:animEffect transition="in" filter="wipe(left)">
+                                    <p:animEffect transition="in" filter="fade">
                                       <p:cBhvr>
-                                        <p:cTn id="20" dur="500"/>
+                                        <p:cTn id="19" dur="500"/>
                                         <p:tgtEl>
                                           <p:spTgt spid="3">
                                             <p:txEl>
-                                              <p:pRg st="4" end="4"/>
+                                              <p:pRg st="3" end="3"/>
                                             </p:txEl>
                                           </p:spTgt>
                                         </p:tgtEl>
@@ -6227,14 +6253,23 @@
                             </p:childTnLst>
                           </p:cTn>
                         </p:par>
+                      </p:childTnLst>
+                    </p:cTn>
+                  </p:par>
+                  <p:par>
+                    <p:cTn id="20" fill="hold">
+                      <p:stCondLst>
+                        <p:cond delay="indefinite"/>
+                      </p:stCondLst>
+                      <p:childTnLst>
                         <p:par>
                           <p:cTn id="21" fill="hold">
                             <p:stCondLst>
-                              <p:cond delay="500"/>
+                              <p:cond delay="0"/>
                             </p:stCondLst>
                             <p:childTnLst>
                               <p:par>
-                                <p:cTn id="22" presetID="10" presetClass="entr" presetSubtype="0" fill="hold" nodeType="afterEffect">
+                                <p:cTn id="22" presetID="22" presetClass="entr" presetSubtype="8" fill="hold" nodeType="clickEffect">
                                   <p:stCondLst>
                                     <p:cond delay="0"/>
                                   </p:stCondLst>
@@ -6261,7 +6296,7 @@
                                         <p:strVal val="visible"/>
                                       </p:to>
                                     </p:set>
-                                    <p:animEffect transition="in" filter="fade">
+                                    <p:animEffect transition="in" filter="wipe(left)">
                                       <p:cBhvr>
                                         <p:cTn id="24" dur="500"/>
                                         <p:tgtEl>
@@ -6282,7 +6317,7 @@
                         <p:par>
                           <p:cTn id="25" fill="hold">
                             <p:stCondLst>
-                              <p:cond delay="1000"/>
+                              <p:cond delay="500"/>
                             </p:stCondLst>
                             <p:childTnLst>
                               <p:par>
@@ -6334,7 +6369,7 @@
                         <p:par>
                           <p:cTn id="29" fill="hold">
                             <p:stCondLst>
-                              <p:cond delay="1500"/>
+                              <p:cond delay="1000"/>
                             </p:stCondLst>
                             <p:childTnLst>
                               <p:par>
@@ -6372,6 +6407,58 @@
                                           <p:spTgt spid="3">
                                             <p:txEl>
                                               <p:pRg st="7" end="7"/>
+                                            </p:txEl>
+                                          </p:spTgt>
+                                        </p:tgtEl>
+                                      </p:cBhvr>
+                                    </p:animEffect>
+                                  </p:childTnLst>
+                                </p:cTn>
+                              </p:par>
+                            </p:childTnLst>
+                          </p:cTn>
+                        </p:par>
+                        <p:par>
+                          <p:cTn id="33" fill="hold">
+                            <p:stCondLst>
+                              <p:cond delay="1500"/>
+                            </p:stCondLst>
+                            <p:childTnLst>
+                              <p:par>
+                                <p:cTn id="34" presetID="10" presetClass="entr" presetSubtype="0" fill="hold" nodeType="afterEffect">
+                                  <p:stCondLst>
+                                    <p:cond delay="0"/>
+                                  </p:stCondLst>
+                                  <p:childTnLst>
+                                    <p:set>
+                                      <p:cBhvr>
+                                        <p:cTn id="35" dur="1" fill="hold">
+                                          <p:stCondLst>
+                                            <p:cond delay="0"/>
+                                          </p:stCondLst>
+                                        </p:cTn>
+                                        <p:tgtEl>
+                                          <p:spTgt spid="3">
+                                            <p:txEl>
+                                              <p:pRg st="8" end="8"/>
+                                            </p:txEl>
+                                          </p:spTgt>
+                                        </p:tgtEl>
+                                        <p:attrNameLst>
+                                          <p:attrName>style.visibility</p:attrName>
+                                        </p:attrNameLst>
+                                      </p:cBhvr>
+                                      <p:to>
+                                        <p:strVal val="visible"/>
+                                      </p:to>
+                                    </p:set>
+                                    <p:animEffect transition="in" filter="fade">
+                                      <p:cBhvr>
+                                        <p:cTn id="36" dur="500"/>
+                                        <p:tgtEl>
+                                          <p:spTgt spid="3">
+                                            <p:txEl>
+                                              <p:pRg st="8" end="8"/>
                                             </p:txEl>
                                           </p:spTgt>
                                         </p:tgtEl>
@@ -6609,7 +6696,15 @@
             </a:pPr>
             <a:r>
               <a:rPr lang="ja-JP" altLang="en-US" sz="3600"/>
-              <a:t>・核家族化が進んでいる可能性</a:t>
+              <a:t>・</a:t>
+            </a:r>
+            <a:r>
+              <a:rPr lang="ja-JP" altLang="en-US" sz="3600" u="sng"/>
+              <a:t>核家族化</a:t>
+            </a:r>
+            <a:r>
+              <a:rPr lang="ja-JP" altLang="en-US" sz="3600"/>
+              <a:t>が進んでいる可能性</a:t>
             </a:r>
             <a:endParaRPr lang="en-US" altLang="ja-JP" sz="3600" dirty="0"/>
           </a:p>

--- a/プレゼンテーション.pptx
+++ b/プレゼンテーション.pptx
@@ -718,7 +718,7 @@
           <a:p>
             <a:fld id="{164B3D7D-398B-0445-A1E4-13E0BD7D0987}" type="datetimeFigureOut">
               <a:rPr kumimoji="1" lang="ja-JP" altLang="en-US" smtClean="0"/>
-              <a:t>2026/7/2</a:t>
+              <a:t>2026/7/6</a:t>
             </a:fld>
             <a:endParaRPr kumimoji="1" lang="ja-JP" altLang="en-US"/>
           </a:p>
@@ -948,7 +948,7 @@
           <a:p>
             <a:fld id="{164B3D7D-398B-0445-A1E4-13E0BD7D0987}" type="datetimeFigureOut">
               <a:rPr kumimoji="1" lang="ja-JP" altLang="en-US" smtClean="0"/>
-              <a:t>2026/7/2</a:t>
+              <a:t>2026/7/6</a:t>
             </a:fld>
             <a:endParaRPr kumimoji="1" lang="ja-JP" altLang="en-US"/>
           </a:p>
@@ -1188,7 +1188,7 @@
           <a:p>
             <a:fld id="{164B3D7D-398B-0445-A1E4-13E0BD7D0987}" type="datetimeFigureOut">
               <a:rPr kumimoji="1" lang="ja-JP" altLang="en-US" smtClean="0"/>
-              <a:t>2026/7/2</a:t>
+              <a:t>2026/7/6</a:t>
             </a:fld>
             <a:endParaRPr kumimoji="1" lang="ja-JP" altLang="en-US"/>
           </a:p>
@@ -1425,7 +1425,7 @@
           <a:p>
             <a:fld id="{164B3D7D-398B-0445-A1E4-13E0BD7D0987}" type="datetimeFigureOut">
               <a:rPr kumimoji="1" lang="ja-JP" altLang="en-US" smtClean="0"/>
-              <a:t>2026/7/2</a:t>
+              <a:t>2026/7/6</a:t>
             </a:fld>
             <a:endParaRPr kumimoji="1" lang="ja-JP" altLang="en-US"/>
           </a:p>
@@ -1703,7 +1703,7 @@
           <a:p>
             <a:fld id="{164B3D7D-398B-0445-A1E4-13E0BD7D0987}" type="datetimeFigureOut">
               <a:rPr kumimoji="1" lang="ja-JP" altLang="en-US" smtClean="0"/>
-              <a:t>2026/7/2</a:t>
+              <a:t>2026/7/6</a:t>
             </a:fld>
             <a:endParaRPr kumimoji="1" lang="ja-JP" altLang="en-US"/>
           </a:p>
@@ -2032,7 +2032,7 @@
           <a:p>
             <a:fld id="{164B3D7D-398B-0445-A1E4-13E0BD7D0987}" type="datetimeFigureOut">
               <a:rPr kumimoji="1" lang="ja-JP" altLang="en-US" smtClean="0"/>
-              <a:t>2026/7/2</a:t>
+              <a:t>2026/7/6</a:t>
             </a:fld>
             <a:endParaRPr kumimoji="1" lang="ja-JP" altLang="en-US"/>
           </a:p>
@@ -2508,7 +2508,7 @@
           <a:p>
             <a:fld id="{164B3D7D-398B-0445-A1E4-13E0BD7D0987}" type="datetimeFigureOut">
               <a:rPr kumimoji="1" lang="ja-JP" altLang="en-US" smtClean="0"/>
-              <a:t>2026/7/2</a:t>
+              <a:t>2026/7/6</a:t>
             </a:fld>
             <a:endParaRPr kumimoji="1" lang="ja-JP" altLang="en-US"/>
           </a:p>
@@ -2649,7 +2649,7 @@
           <a:p>
             <a:fld id="{164B3D7D-398B-0445-A1E4-13E0BD7D0987}" type="datetimeFigureOut">
               <a:rPr kumimoji="1" lang="ja-JP" altLang="en-US" smtClean="0"/>
-              <a:t>2026/7/2</a:t>
+              <a:t>2026/7/6</a:t>
             </a:fld>
             <a:endParaRPr kumimoji="1" lang="ja-JP" altLang="en-US"/>
           </a:p>
@@ -2762,7 +2762,7 @@
           <a:p>
             <a:fld id="{164B3D7D-398B-0445-A1E4-13E0BD7D0987}" type="datetimeFigureOut">
               <a:rPr kumimoji="1" lang="ja-JP" altLang="en-US" smtClean="0"/>
-              <a:t>2026/7/2</a:t>
+              <a:t>2026/7/6</a:t>
             </a:fld>
             <a:endParaRPr kumimoji="1" lang="ja-JP" altLang="en-US"/>
           </a:p>
@@ -3105,7 +3105,7 @@
           <a:p>
             <a:fld id="{164B3D7D-398B-0445-A1E4-13E0BD7D0987}" type="datetimeFigureOut">
               <a:rPr kumimoji="1" lang="ja-JP" altLang="en-US" smtClean="0"/>
-              <a:t>2026/7/2</a:t>
+              <a:t>2026/7/6</a:t>
             </a:fld>
             <a:endParaRPr kumimoji="1" lang="ja-JP" altLang="en-US"/>
           </a:p>
@@ -3393,7 +3393,7 @@
           <a:p>
             <a:fld id="{164B3D7D-398B-0445-A1E4-13E0BD7D0987}" type="datetimeFigureOut">
               <a:rPr kumimoji="1" lang="ja-JP" altLang="en-US" smtClean="0"/>
-              <a:t>2026/7/2</a:t>
+              <a:t>2026/7/6</a:t>
             </a:fld>
             <a:endParaRPr kumimoji="1" lang="ja-JP" altLang="en-US"/>
           </a:p>
@@ -3666,7 +3666,7 @@
           <a:p>
             <a:fld id="{164B3D7D-398B-0445-A1E4-13E0BD7D0987}" type="datetimeFigureOut">
               <a:rPr kumimoji="1" lang="ja-JP" altLang="en-US" smtClean="0"/>
-              <a:t>2026/7/2</a:t>
+              <a:t>2026/7/6</a:t>
             </a:fld>
             <a:endParaRPr kumimoji="1" lang="ja-JP" altLang="en-US"/>
           </a:p>
@@ -5286,10 +5286,16 @@
           <a:lstStyle/>
           <a:p>
             <a:r>
-              <a:rPr kumimoji="1" lang="ja-JP" altLang="en-US" sz="2400"/>
+              <a:rPr kumimoji="1" lang="ja-JP" altLang="en-US" sz="2400">
+                <a:latin typeface="Yu Gothic" panose="020B0400000000000000" pitchFamily="34" charset="-128"/>
+                <a:ea typeface="Yu Gothic" panose="020B0400000000000000" pitchFamily="34" charset="-128"/>
+              </a:rPr>
               <a:t>外国人人口</a:t>
             </a:r>
-            <a:endParaRPr lang="en-US" altLang="ja-JP" sz="2400" dirty="0"/>
+            <a:endParaRPr lang="en-US" altLang="ja-JP" sz="2400" dirty="0">
+              <a:latin typeface="Yu Gothic" panose="020B0400000000000000" pitchFamily="34" charset="-128"/>
+              <a:ea typeface="Yu Gothic" panose="020B0400000000000000" pitchFamily="34" charset="-128"/>
+            </a:endParaRPr>
           </a:p>
           <a:p>
             <a:r>
@@ -5297,7 +5303,8 @@
                 <a:solidFill>
                   <a:srgbClr val="000000"/>
                 </a:solidFill>
-                <a:latin typeface="Gen Interface JP"/>
+                <a:latin typeface="Yu Gothic" panose="020B0400000000000000" pitchFamily="34" charset="-128"/>
+                <a:ea typeface="Yu Gothic" panose="020B0400000000000000" pitchFamily="34" charset="-128"/>
               </a:rPr>
               <a:t>事業所数（民営）（農業、林業）</a:t>
             </a:r>
@@ -5305,7 +5312,8 @@
               <a:solidFill>
                 <a:srgbClr val="000000"/>
               </a:solidFill>
-              <a:latin typeface="Gen Interface JP"/>
+              <a:latin typeface="Yu Gothic" panose="020B0400000000000000" pitchFamily="34" charset="-128"/>
+              <a:ea typeface="Yu Gothic" panose="020B0400000000000000" pitchFamily="34" charset="-128"/>
             </a:endParaRPr>
           </a:p>
           <a:p>
@@ -5314,7 +5322,8 @@
                 <a:solidFill>
                   <a:srgbClr val="000000"/>
                 </a:solidFill>
-                <a:latin typeface="Gen Interface JP"/>
+                <a:latin typeface="Yu Gothic" panose="020B0400000000000000" pitchFamily="34" charset="-128"/>
+                <a:ea typeface="Yu Gothic" panose="020B0400000000000000" pitchFamily="34" charset="-128"/>
               </a:rPr>
               <a:t>歳出</a:t>
             </a:r>
@@ -5323,7 +5332,8 @@
                 <a:solidFill>
                   <a:srgbClr val="000000"/>
                 </a:solidFill>
-                <a:latin typeface="Gen Interface JP"/>
+                <a:latin typeface="Yu Gothic" panose="020B0400000000000000" pitchFamily="34" charset="-128"/>
+                <a:ea typeface="Yu Gothic" panose="020B0400000000000000" pitchFamily="34" charset="-128"/>
               </a:rPr>
               <a:t>決算総額（市町村財政）</a:t>
             </a:r>
@@ -5331,7 +5341,8 @@
               <a:solidFill>
                 <a:srgbClr val="000000"/>
               </a:solidFill>
-              <a:latin typeface="Gen Interface JP"/>
+              <a:latin typeface="Yu Gothic" panose="020B0400000000000000" pitchFamily="34" charset="-128"/>
+              <a:ea typeface="Yu Gothic" panose="020B0400000000000000" pitchFamily="34" charset="-128"/>
             </a:endParaRPr>
           </a:p>
           <a:p>
@@ -5340,7 +5351,8 @@
                 <a:solidFill>
                   <a:srgbClr val="000000"/>
                 </a:solidFill>
-                <a:latin typeface="Gen Interface JP"/>
+                <a:latin typeface="Yu Gothic" panose="020B0400000000000000" pitchFamily="34" charset="-128"/>
+                <a:ea typeface="Yu Gothic" panose="020B0400000000000000" pitchFamily="34" charset="-128"/>
               </a:rPr>
               <a:t>民生費（市町村財政）</a:t>
             </a:r>
@@ -5348,7 +5360,8 @@
               <a:solidFill>
                 <a:srgbClr val="000000"/>
               </a:solidFill>
-              <a:latin typeface="Gen Interface JP"/>
+              <a:latin typeface="Yu Gothic" panose="020B0400000000000000" pitchFamily="34" charset="-128"/>
+              <a:ea typeface="Yu Gothic" panose="020B0400000000000000" pitchFamily="34" charset="-128"/>
             </a:endParaRPr>
           </a:p>
           <a:p>
@@ -5357,7 +5370,8 @@
                 <a:solidFill>
                   <a:srgbClr val="000000"/>
                 </a:solidFill>
-                <a:latin typeface="Gen Interface JP"/>
+                <a:latin typeface="Yu Gothic" panose="020B0400000000000000" pitchFamily="34" charset="-128"/>
+                <a:ea typeface="Yu Gothic" panose="020B0400000000000000" pitchFamily="34" charset="-128"/>
               </a:rPr>
               <a:t>幼稚園在園者数</a:t>
             </a:r>
@@ -5365,7 +5379,8 @@
               <a:solidFill>
                 <a:srgbClr val="000000"/>
               </a:solidFill>
-              <a:latin typeface="Gen Interface JP"/>
+              <a:latin typeface="Yu Gothic" panose="020B0400000000000000" pitchFamily="34" charset="-128"/>
+              <a:ea typeface="Yu Gothic" panose="020B0400000000000000" pitchFamily="34" charset="-128"/>
             </a:endParaRPr>
           </a:p>
           <a:p>
@@ -5374,7 +5389,8 @@
                 <a:solidFill>
                   <a:srgbClr val="000000"/>
                 </a:solidFill>
-                <a:latin typeface="Gen Interface JP"/>
+                <a:latin typeface="Yu Gothic" panose="020B0400000000000000" pitchFamily="34" charset="-128"/>
+                <a:ea typeface="Yu Gothic" panose="020B0400000000000000" pitchFamily="34" charset="-128"/>
               </a:rPr>
               <a:t>高等学校生徒数</a:t>
             </a:r>
@@ -5382,7 +5398,8 @@
               <a:solidFill>
                 <a:srgbClr val="000000"/>
               </a:solidFill>
-              <a:latin typeface="Gen Interface JP"/>
+              <a:latin typeface="Yu Gothic" panose="020B0400000000000000" pitchFamily="34" charset="-128"/>
+              <a:ea typeface="Yu Gothic" panose="020B0400000000000000" pitchFamily="34" charset="-128"/>
             </a:endParaRPr>
           </a:p>
           <a:p>
@@ -5391,7 +5408,8 @@
                 <a:solidFill>
                   <a:srgbClr val="000000"/>
                 </a:solidFill>
-                <a:latin typeface="Gen Interface JP"/>
+                <a:latin typeface="Yu Gothic" panose="020B0400000000000000" pitchFamily="34" charset="-128"/>
+                <a:ea typeface="Yu Gothic" panose="020B0400000000000000" pitchFamily="34" charset="-128"/>
               </a:rPr>
               <a:t>第３次産業就業者数</a:t>
             </a:r>
@@ -5399,7 +5417,8 @@
               <a:solidFill>
                 <a:srgbClr val="000000"/>
               </a:solidFill>
-              <a:latin typeface="Gen Interface JP"/>
+              <a:latin typeface="Yu Gothic" panose="020B0400000000000000" pitchFamily="34" charset="-128"/>
+              <a:ea typeface="Yu Gothic" panose="020B0400000000000000" pitchFamily="34" charset="-128"/>
             </a:endParaRPr>
           </a:p>
           <a:p>
@@ -5408,7 +5427,8 @@
                 <a:solidFill>
                   <a:srgbClr val="000000"/>
                 </a:solidFill>
-                <a:latin typeface="Gen Interface JP"/>
+                <a:latin typeface="Yu Gothic" panose="020B0400000000000000" pitchFamily="34" charset="-128"/>
+                <a:ea typeface="Yu Gothic" panose="020B0400000000000000" pitchFamily="34" charset="-128"/>
               </a:rPr>
               <a:t>p15歳未満人口</a:t>
             </a:r>
@@ -5416,7 +5436,8 @@
               <a:solidFill>
                 <a:srgbClr val="000000"/>
               </a:solidFill>
-              <a:latin typeface="Gen Interface JP"/>
+              <a:latin typeface="Yu Gothic" panose="020B0400000000000000" pitchFamily="34" charset="-128"/>
+              <a:ea typeface="Yu Gothic" panose="020B0400000000000000" pitchFamily="34" charset="-128"/>
             </a:endParaRPr>
           </a:p>
         </p:txBody>
@@ -5618,7 +5639,8 @@
                 <a:solidFill>
                   <a:srgbClr val="000000"/>
                 </a:solidFill>
-                <a:latin typeface="Gen Interface JP"/>
+                <a:latin typeface="Yu Gothic" panose="020B0400000000000000" pitchFamily="34" charset="-128"/>
+                <a:ea typeface="Yu Gothic" panose="020B0400000000000000" pitchFamily="34" charset="-128"/>
               </a:rPr>
               <a:t>p65歳以上の世帯員のいる核家族世帯数</a:t>
             </a:r>
@@ -5626,7 +5648,8 @@
               <a:solidFill>
                 <a:srgbClr val="000000"/>
               </a:solidFill>
-              <a:latin typeface="Gen Interface JP"/>
+              <a:latin typeface="Yu Gothic" panose="020B0400000000000000" pitchFamily="34" charset="-128"/>
+              <a:ea typeface="Yu Gothic" panose="020B0400000000000000" pitchFamily="34" charset="-128"/>
             </a:endParaRPr>
           </a:p>
           <a:p>
@@ -5635,7 +5658,8 @@
                 <a:solidFill>
                   <a:srgbClr val="000000"/>
                 </a:solidFill>
-                <a:latin typeface="Gen Interface JP"/>
+                <a:latin typeface="Yu Gothic" panose="020B0400000000000000" pitchFamily="34" charset="-128"/>
+                <a:ea typeface="Yu Gothic" panose="020B0400000000000000" pitchFamily="34" charset="-128"/>
               </a:rPr>
               <a:t>p従業者数（民営）（卸売業、小売業）p農家数（自給的農家）</a:t>
             </a:r>
@@ -5643,7 +5667,8 @@
               <a:solidFill>
                 <a:srgbClr val="000000"/>
               </a:solidFill>
-              <a:latin typeface="Gen Interface JP"/>
+              <a:latin typeface="Yu Gothic" panose="020B0400000000000000" pitchFamily="34" charset="-128"/>
+              <a:ea typeface="Yu Gothic" panose="020B0400000000000000" pitchFamily="34" charset="-128"/>
             </a:endParaRPr>
           </a:p>
           <a:p>
@@ -5652,7 +5677,8 @@
                 <a:solidFill>
                   <a:srgbClr val="000000"/>
                 </a:solidFill>
-                <a:latin typeface="Gen Interface JP"/>
+                <a:latin typeface="Yu Gothic" panose="020B0400000000000000" pitchFamily="34" charset="-128"/>
+                <a:ea typeface="Yu Gothic" panose="020B0400000000000000" pitchFamily="34" charset="-128"/>
               </a:rPr>
               <a:t>p従業者数（民営）（医療、福祉）</a:t>
             </a:r>
@@ -5660,7 +5686,8 @@
               <a:solidFill>
                 <a:srgbClr val="000000"/>
               </a:solidFill>
-              <a:latin typeface="Gen Interface JP"/>
+              <a:latin typeface="Yu Gothic" panose="020B0400000000000000" pitchFamily="34" charset="-128"/>
+              <a:ea typeface="Yu Gothic" panose="020B0400000000000000" pitchFamily="34" charset="-128"/>
             </a:endParaRPr>
           </a:p>
           <a:p>
@@ -5669,7 +5696,8 @@
                 <a:solidFill>
                   <a:srgbClr val="000000"/>
                 </a:solidFill>
-                <a:latin typeface="Gen Interface JP"/>
+                <a:latin typeface="Yu Gothic" panose="020B0400000000000000" pitchFamily="34" charset="-128"/>
+                <a:ea typeface="Yu Gothic" panose="020B0400000000000000" pitchFamily="34" charset="-128"/>
               </a:rPr>
               <a:t>p歳出決算総額（市町村財政）</a:t>
             </a:r>
@@ -5677,7 +5705,8 @@
               <a:solidFill>
                 <a:srgbClr val="000000"/>
               </a:solidFill>
-              <a:latin typeface="Gen Interface JP"/>
+              <a:latin typeface="Yu Gothic" panose="020B0400000000000000" pitchFamily="34" charset="-128"/>
+              <a:ea typeface="Yu Gothic" panose="020B0400000000000000" pitchFamily="34" charset="-128"/>
             </a:endParaRPr>
           </a:p>
           <a:p>
@@ -5686,7 +5715,8 @@
                 <a:solidFill>
                   <a:srgbClr val="000000"/>
                 </a:solidFill>
-                <a:latin typeface="Gen Interface JP"/>
+                <a:latin typeface="Yu Gothic" panose="020B0400000000000000" pitchFamily="34" charset="-128"/>
+                <a:ea typeface="Yu Gothic" panose="020B0400000000000000" pitchFamily="34" charset="-128"/>
               </a:rPr>
               <a:t>p第１次産業就業者数</a:t>
             </a:r>
@@ -5694,7 +5724,8 @@
               <a:solidFill>
                 <a:srgbClr val="000000"/>
               </a:solidFill>
-              <a:latin typeface="Gen Interface JP"/>
+              <a:latin typeface="Yu Gothic" panose="020B0400000000000000" pitchFamily="34" charset="-128"/>
+              <a:ea typeface="Yu Gothic" panose="020B0400000000000000" pitchFamily="34" charset="-128"/>
             </a:endParaRPr>
           </a:p>
           <a:p>
@@ -5703,7 +5734,8 @@
                 <a:solidFill>
                   <a:srgbClr val="000000"/>
                 </a:solidFill>
-                <a:latin typeface="Gen Interface JP"/>
+                <a:latin typeface="Yu Gothic" panose="020B0400000000000000" pitchFamily="34" charset="-128"/>
+                <a:ea typeface="Yu Gothic" panose="020B0400000000000000" pitchFamily="34" charset="-128"/>
               </a:rPr>
               <a:t>p第２次産業就業者数</a:t>
             </a:r>
@@ -5711,7 +5743,8 @@
               <a:solidFill>
                 <a:srgbClr val="000000"/>
               </a:solidFill>
-              <a:latin typeface="Gen Interface JP"/>
+              <a:latin typeface="Yu Gothic" panose="020B0400000000000000" pitchFamily="34" charset="-128"/>
+              <a:ea typeface="Yu Gothic" panose="020B0400000000000000" pitchFamily="34" charset="-128"/>
             </a:endParaRPr>
           </a:p>
           <a:p>
@@ -5720,7 +5753,8 @@
                 <a:solidFill>
                   <a:srgbClr val="000000"/>
                 </a:solidFill>
-                <a:latin typeface="Gen Interface JP"/>
+                <a:latin typeface="Yu Gothic" panose="020B0400000000000000" pitchFamily="34" charset="-128"/>
+                <a:ea typeface="Yu Gothic" panose="020B0400000000000000" pitchFamily="34" charset="-128"/>
               </a:rPr>
               <a:t>p第３次産業就業者数</a:t>
             </a:r>
@@ -5728,7 +5762,8 @@
               <a:solidFill>
                 <a:srgbClr val="000000"/>
               </a:solidFill>
-              <a:latin typeface="Gen Interface JP"/>
+              <a:latin typeface="Yu Gothic" panose="020B0400000000000000" pitchFamily="34" charset="-128"/>
+              <a:ea typeface="Yu Gothic" panose="020B0400000000000000" pitchFamily="34" charset="-128"/>
             </a:endParaRPr>
           </a:p>
           <a:p>
@@ -5737,11 +5772,257 @@
                 <a:solidFill>
                   <a:srgbClr val="000000"/>
                 </a:solidFill>
-                <a:latin typeface="Gen Interface JP"/>
+                <a:latin typeface="Yu Gothic" panose="020B0400000000000000" pitchFamily="34" charset="-128"/>
+                <a:ea typeface="Yu Gothic" panose="020B0400000000000000" pitchFamily="34" charset="-128"/>
               </a:rPr>
               <a:t>p小売店数</a:t>
             </a:r>
-            <a:endParaRPr lang="en-US" altLang="ja-JP" sz="2400" dirty="0"/>
+            <a:endParaRPr lang="en-US" altLang="ja-JP" sz="2400" dirty="0">
+              <a:latin typeface="Yu Gothic" panose="020B0400000000000000" pitchFamily="34" charset="-128"/>
+              <a:ea typeface="Yu Gothic" panose="020B0400000000000000" pitchFamily="34" charset="-128"/>
+            </a:endParaRPr>
+          </a:p>
+        </p:txBody>
+      </p:sp>
+      <p:sp>
+        <p:nvSpPr>
+          <p:cNvPr id="5" name="コンテンツ プレースホルダー 2">
+            <a:extLst>
+              <a:ext uri="{FF2B5EF4-FFF2-40B4-BE49-F238E27FC236}">
+                <a16:creationId xmlns:a16="http://schemas.microsoft.com/office/drawing/2014/main" id="{82C1FBE7-44F8-8215-84DB-961300CB5C8E}"/>
+              </a:ext>
+            </a:extLst>
+          </p:cNvPr>
+          <p:cNvSpPr txBox="1">
+            <a:spLocks/>
+          </p:cNvSpPr>
+          <p:nvPr/>
+        </p:nvSpPr>
+        <p:spPr>
+          <a:xfrm>
+            <a:off x="8305800" y="6253878"/>
+            <a:ext cx="3305229" cy="681037"/>
+          </a:xfrm>
+          <a:prstGeom prst="rect">
+            <a:avLst/>
+          </a:prstGeom>
+        </p:spPr>
+        <p:txBody>
+          <a:bodyPr vert="horz" lIns="91440" tIns="45720" rIns="91440" bIns="45720" rtlCol="0">
+            <a:normAutofit/>
+          </a:bodyPr>
+          <a:lstStyle>
+            <a:lvl1pPr marL="228600" indent="-228600" algn="l" defTabSz="914400" rtl="0" eaLnBrk="1" latinLnBrk="0" hangingPunct="1">
+              <a:lnSpc>
+                <a:spcPct val="90000"/>
+              </a:lnSpc>
+              <a:spcBef>
+                <a:spcPts val="1000"/>
+              </a:spcBef>
+              <a:buFont typeface="Arial" panose="020B0604020202020204" pitchFamily="34" charset="0"/>
+              <a:buChar char="•"/>
+              <a:defRPr kumimoji="1" sz="2800" kern="1200">
+                <a:solidFill>
+                  <a:schemeClr val="tx1"/>
+                </a:solidFill>
+                <a:latin typeface="+mn-lt"/>
+                <a:ea typeface="+mn-ea"/>
+                <a:cs typeface="+mn-cs"/>
+              </a:defRPr>
+            </a:lvl1pPr>
+            <a:lvl2pPr marL="685800" indent="-228600" algn="l" defTabSz="914400" rtl="0" eaLnBrk="1" latinLnBrk="0" hangingPunct="1">
+              <a:lnSpc>
+                <a:spcPct val="90000"/>
+              </a:lnSpc>
+              <a:spcBef>
+                <a:spcPts val="500"/>
+              </a:spcBef>
+              <a:buFont typeface="Arial" panose="020B0604020202020204" pitchFamily="34" charset="0"/>
+              <a:buChar char="•"/>
+              <a:defRPr kumimoji="1" sz="2400" kern="1200">
+                <a:solidFill>
+                  <a:schemeClr val="tx1"/>
+                </a:solidFill>
+                <a:latin typeface="+mn-lt"/>
+                <a:ea typeface="+mn-ea"/>
+                <a:cs typeface="+mn-cs"/>
+              </a:defRPr>
+            </a:lvl2pPr>
+            <a:lvl3pPr marL="1143000" indent="-228600" algn="l" defTabSz="914400" rtl="0" eaLnBrk="1" latinLnBrk="0" hangingPunct="1">
+              <a:lnSpc>
+                <a:spcPct val="90000"/>
+              </a:lnSpc>
+              <a:spcBef>
+                <a:spcPts val="500"/>
+              </a:spcBef>
+              <a:buFont typeface="Arial" panose="020B0604020202020204" pitchFamily="34" charset="0"/>
+              <a:buChar char="•"/>
+              <a:defRPr kumimoji="1" sz="2000" kern="1200">
+                <a:solidFill>
+                  <a:schemeClr val="tx1"/>
+                </a:solidFill>
+                <a:latin typeface="+mn-lt"/>
+                <a:ea typeface="+mn-ea"/>
+                <a:cs typeface="+mn-cs"/>
+              </a:defRPr>
+            </a:lvl3pPr>
+            <a:lvl4pPr marL="1600200" indent="-228600" algn="l" defTabSz="914400" rtl="0" eaLnBrk="1" latinLnBrk="0" hangingPunct="1">
+              <a:lnSpc>
+                <a:spcPct val="90000"/>
+              </a:lnSpc>
+              <a:spcBef>
+                <a:spcPts val="500"/>
+              </a:spcBef>
+              <a:buFont typeface="Arial" panose="020B0604020202020204" pitchFamily="34" charset="0"/>
+              <a:buChar char="•"/>
+              <a:defRPr kumimoji="1" sz="1800" kern="1200">
+                <a:solidFill>
+                  <a:schemeClr val="tx1"/>
+                </a:solidFill>
+                <a:latin typeface="+mn-lt"/>
+                <a:ea typeface="+mn-ea"/>
+                <a:cs typeface="+mn-cs"/>
+              </a:defRPr>
+            </a:lvl4pPr>
+            <a:lvl5pPr marL="2057400" indent="-228600" algn="l" defTabSz="914400" rtl="0" eaLnBrk="1" latinLnBrk="0" hangingPunct="1">
+              <a:lnSpc>
+                <a:spcPct val="90000"/>
+              </a:lnSpc>
+              <a:spcBef>
+                <a:spcPts val="500"/>
+              </a:spcBef>
+              <a:buFont typeface="Arial" panose="020B0604020202020204" pitchFamily="34" charset="0"/>
+              <a:buChar char="•"/>
+              <a:defRPr kumimoji="1" sz="1800" kern="1200">
+                <a:solidFill>
+                  <a:schemeClr val="tx1"/>
+                </a:solidFill>
+                <a:latin typeface="+mn-lt"/>
+                <a:ea typeface="+mn-ea"/>
+                <a:cs typeface="+mn-cs"/>
+              </a:defRPr>
+            </a:lvl5pPr>
+            <a:lvl6pPr marL="2514600" indent="-228600" algn="l" defTabSz="914400" rtl="0" eaLnBrk="1" latinLnBrk="0" hangingPunct="1">
+              <a:lnSpc>
+                <a:spcPct val="90000"/>
+              </a:lnSpc>
+              <a:spcBef>
+                <a:spcPts val="500"/>
+              </a:spcBef>
+              <a:buFont typeface="Arial" panose="020B0604020202020204" pitchFamily="34" charset="0"/>
+              <a:buChar char="•"/>
+              <a:defRPr kumimoji="1" sz="1800" kern="1200">
+                <a:solidFill>
+                  <a:schemeClr val="tx1"/>
+                </a:solidFill>
+                <a:latin typeface="+mn-lt"/>
+                <a:ea typeface="+mn-ea"/>
+                <a:cs typeface="+mn-cs"/>
+              </a:defRPr>
+            </a:lvl6pPr>
+            <a:lvl7pPr marL="2971800" indent="-228600" algn="l" defTabSz="914400" rtl="0" eaLnBrk="1" latinLnBrk="0" hangingPunct="1">
+              <a:lnSpc>
+                <a:spcPct val="90000"/>
+              </a:lnSpc>
+              <a:spcBef>
+                <a:spcPts val="500"/>
+              </a:spcBef>
+              <a:buFont typeface="Arial" panose="020B0604020202020204" pitchFamily="34" charset="0"/>
+              <a:buChar char="•"/>
+              <a:defRPr kumimoji="1" sz="1800" kern="1200">
+                <a:solidFill>
+                  <a:schemeClr val="tx1"/>
+                </a:solidFill>
+                <a:latin typeface="+mn-lt"/>
+                <a:ea typeface="+mn-ea"/>
+                <a:cs typeface="+mn-cs"/>
+              </a:defRPr>
+            </a:lvl7pPr>
+            <a:lvl8pPr marL="3429000" indent="-228600" algn="l" defTabSz="914400" rtl="0" eaLnBrk="1" latinLnBrk="0" hangingPunct="1">
+              <a:lnSpc>
+                <a:spcPct val="90000"/>
+              </a:lnSpc>
+              <a:spcBef>
+                <a:spcPts val="500"/>
+              </a:spcBef>
+              <a:buFont typeface="Arial" panose="020B0604020202020204" pitchFamily="34" charset="0"/>
+              <a:buChar char="•"/>
+              <a:defRPr kumimoji="1" sz="1800" kern="1200">
+                <a:solidFill>
+                  <a:schemeClr val="tx1"/>
+                </a:solidFill>
+                <a:latin typeface="+mn-lt"/>
+                <a:ea typeface="+mn-ea"/>
+                <a:cs typeface="+mn-cs"/>
+              </a:defRPr>
+            </a:lvl8pPr>
+            <a:lvl9pPr marL="3886200" indent="-228600" algn="l" defTabSz="914400" rtl="0" eaLnBrk="1" latinLnBrk="0" hangingPunct="1">
+              <a:lnSpc>
+                <a:spcPct val="90000"/>
+              </a:lnSpc>
+              <a:spcBef>
+                <a:spcPts val="500"/>
+              </a:spcBef>
+              <a:buFont typeface="Arial" panose="020B0604020202020204" pitchFamily="34" charset="0"/>
+              <a:buChar char="•"/>
+              <a:defRPr kumimoji="1" sz="1800" kern="1200">
+                <a:solidFill>
+                  <a:schemeClr val="tx1"/>
+                </a:solidFill>
+                <a:latin typeface="+mn-lt"/>
+                <a:ea typeface="+mn-ea"/>
+                <a:cs typeface="+mn-cs"/>
+              </a:defRPr>
+            </a:lvl9pPr>
+          </a:lstStyle>
+          <a:p>
+            <a:pPr marL="0" indent="0" algn="r">
+              <a:buNone/>
+            </a:pPr>
+            <a:r>
+              <a:rPr lang="en-US" altLang="ja-JP" sz="2400" dirty="0">
+                <a:solidFill>
+                  <a:srgbClr val="000000"/>
+                </a:solidFill>
+                <a:latin typeface="Yu Gothic" panose="020B0400000000000000" pitchFamily="34" charset="-128"/>
+                <a:ea typeface="Yu Gothic" panose="020B0400000000000000" pitchFamily="34" charset="-128"/>
+              </a:rPr>
+              <a:t>※p</a:t>
+            </a:r>
+            <a:r>
+              <a:rPr lang="ja-JP" altLang="en-US" sz="2400">
+                <a:solidFill>
+                  <a:srgbClr val="000000"/>
+                </a:solidFill>
+                <a:latin typeface="Yu Gothic" panose="020B0400000000000000" pitchFamily="34" charset="-128"/>
+                <a:ea typeface="Yu Gothic" panose="020B0400000000000000" pitchFamily="34" charset="-128"/>
+              </a:rPr>
+              <a:t>：人口</a:t>
+            </a:r>
+            <a:r>
+              <a:rPr lang="en-US" altLang="ja-JP" sz="2400" dirty="0">
+                <a:solidFill>
+                  <a:srgbClr val="000000"/>
+                </a:solidFill>
+                <a:latin typeface="Yu Gothic" panose="020B0400000000000000" pitchFamily="34" charset="-128"/>
+                <a:ea typeface="Yu Gothic" panose="020B0400000000000000" pitchFamily="34" charset="-128"/>
+              </a:rPr>
+              <a:t>1</a:t>
+            </a:r>
+            <a:r>
+              <a:rPr lang="ja-JP" altLang="en-US" sz="2400">
+                <a:solidFill>
+                  <a:srgbClr val="000000"/>
+                </a:solidFill>
+                <a:latin typeface="Yu Gothic" panose="020B0400000000000000" pitchFamily="34" charset="-128"/>
+                <a:ea typeface="Yu Gothic" panose="020B0400000000000000" pitchFamily="34" charset="-128"/>
+              </a:rPr>
+              <a:t>人あたり</a:t>
+            </a:r>
+            <a:endParaRPr lang="en-US" altLang="ja-JP" sz="2400" dirty="0">
+              <a:latin typeface="Yu Gothic" panose="020B0400000000000000" pitchFamily="34" charset="-128"/>
+              <a:ea typeface="Yu Gothic" panose="020B0400000000000000" pitchFamily="34" charset="-128"/>
+            </a:endParaRPr>
           </a:p>
         </p:txBody>
       </p:sp>
@@ -7194,12 +7475,570 @@
             <p:ph idx="1"/>
           </p:nvPr>
         </p:nvSpPr>
-        <p:spPr/>
-        <p:txBody>
-          <a:bodyPr/>
+        <p:spPr>
+          <a:xfrm>
+            <a:off x="2640330" y="2210753"/>
+            <a:ext cx="6911340" cy="826135"/>
+          </a:xfrm>
+          <a:ln>
+            <a:solidFill>
+              <a:schemeClr val="tx1"/>
+            </a:solidFill>
+          </a:ln>
+        </p:spPr>
+        <p:txBody>
+          <a:bodyPr anchor="ctr">
+            <a:normAutofit/>
+          </a:bodyPr>
           <a:lstStyle/>
           <a:p>
-            <a:endParaRPr kumimoji="1" lang="ja-JP" altLang="en-US"/>
+            <a:pPr marL="0" indent="0" algn="ctr">
+              <a:buNone/>
+            </a:pPr>
+            <a:r>
+              <a:rPr kumimoji="1" lang="ja-JP" altLang="en-US"/>
+              <a:t>関係のありそうな説明変数を含めて分析</a:t>
+            </a:r>
+          </a:p>
+        </p:txBody>
+      </p:sp>
+      <p:sp>
+        <p:nvSpPr>
+          <p:cNvPr id="4" name="コンテンツ プレースホルダー 2">
+            <a:extLst>
+              <a:ext uri="{FF2B5EF4-FFF2-40B4-BE49-F238E27FC236}">
+                <a16:creationId xmlns:a16="http://schemas.microsoft.com/office/drawing/2014/main" id="{80A0A63F-02F7-75BC-0C4C-6AAB613A47C9}"/>
+              </a:ext>
+            </a:extLst>
+          </p:cNvPr>
+          <p:cNvSpPr txBox="1">
+            <a:spLocks/>
+          </p:cNvSpPr>
+          <p:nvPr/>
+        </p:nvSpPr>
+        <p:spPr>
+          <a:xfrm>
+            <a:off x="2640330" y="4318586"/>
+            <a:ext cx="6911340" cy="826135"/>
+          </a:xfrm>
+          <a:prstGeom prst="rect">
+            <a:avLst/>
+          </a:prstGeom>
+          <a:ln>
+            <a:solidFill>
+              <a:schemeClr val="tx1"/>
+            </a:solidFill>
+          </a:ln>
+        </p:spPr>
+        <p:txBody>
+          <a:bodyPr vert="horz" lIns="91440" tIns="45720" rIns="91440" bIns="45720" rtlCol="0" anchor="ctr">
+            <a:normAutofit/>
+          </a:bodyPr>
+          <a:lstStyle>
+            <a:lvl1pPr marL="228600" indent="-228600" algn="l" defTabSz="914400" rtl="0" eaLnBrk="1" latinLnBrk="0" hangingPunct="1">
+              <a:lnSpc>
+                <a:spcPct val="90000"/>
+              </a:lnSpc>
+              <a:spcBef>
+                <a:spcPts val="1000"/>
+              </a:spcBef>
+              <a:buFont typeface="Arial" panose="020B0604020202020204" pitchFamily="34" charset="0"/>
+              <a:buChar char="•"/>
+              <a:defRPr kumimoji="1" sz="2800" kern="1200">
+                <a:solidFill>
+                  <a:schemeClr val="tx1"/>
+                </a:solidFill>
+                <a:latin typeface="+mn-lt"/>
+                <a:ea typeface="+mn-ea"/>
+                <a:cs typeface="+mn-cs"/>
+              </a:defRPr>
+            </a:lvl1pPr>
+            <a:lvl2pPr marL="685800" indent="-228600" algn="l" defTabSz="914400" rtl="0" eaLnBrk="1" latinLnBrk="0" hangingPunct="1">
+              <a:lnSpc>
+                <a:spcPct val="90000"/>
+              </a:lnSpc>
+              <a:spcBef>
+                <a:spcPts val="500"/>
+              </a:spcBef>
+              <a:buFont typeface="Arial" panose="020B0604020202020204" pitchFamily="34" charset="0"/>
+              <a:buChar char="•"/>
+              <a:defRPr kumimoji="1" sz="2400" kern="1200">
+                <a:solidFill>
+                  <a:schemeClr val="tx1"/>
+                </a:solidFill>
+                <a:latin typeface="+mn-lt"/>
+                <a:ea typeface="+mn-ea"/>
+                <a:cs typeface="+mn-cs"/>
+              </a:defRPr>
+            </a:lvl2pPr>
+            <a:lvl3pPr marL="1143000" indent="-228600" algn="l" defTabSz="914400" rtl="0" eaLnBrk="1" latinLnBrk="0" hangingPunct="1">
+              <a:lnSpc>
+                <a:spcPct val="90000"/>
+              </a:lnSpc>
+              <a:spcBef>
+                <a:spcPts val="500"/>
+              </a:spcBef>
+              <a:buFont typeface="Arial" panose="020B0604020202020204" pitchFamily="34" charset="0"/>
+              <a:buChar char="•"/>
+              <a:defRPr kumimoji="1" sz="2000" kern="1200">
+                <a:solidFill>
+                  <a:schemeClr val="tx1"/>
+                </a:solidFill>
+                <a:latin typeface="+mn-lt"/>
+                <a:ea typeface="+mn-ea"/>
+                <a:cs typeface="+mn-cs"/>
+              </a:defRPr>
+            </a:lvl3pPr>
+            <a:lvl4pPr marL="1600200" indent="-228600" algn="l" defTabSz="914400" rtl="0" eaLnBrk="1" latinLnBrk="0" hangingPunct="1">
+              <a:lnSpc>
+                <a:spcPct val="90000"/>
+              </a:lnSpc>
+              <a:spcBef>
+                <a:spcPts val="500"/>
+              </a:spcBef>
+              <a:buFont typeface="Arial" panose="020B0604020202020204" pitchFamily="34" charset="0"/>
+              <a:buChar char="•"/>
+              <a:defRPr kumimoji="1" sz="1800" kern="1200">
+                <a:solidFill>
+                  <a:schemeClr val="tx1"/>
+                </a:solidFill>
+                <a:latin typeface="+mn-lt"/>
+                <a:ea typeface="+mn-ea"/>
+                <a:cs typeface="+mn-cs"/>
+              </a:defRPr>
+            </a:lvl4pPr>
+            <a:lvl5pPr marL="2057400" indent="-228600" algn="l" defTabSz="914400" rtl="0" eaLnBrk="1" latinLnBrk="0" hangingPunct="1">
+              <a:lnSpc>
+                <a:spcPct val="90000"/>
+              </a:lnSpc>
+              <a:spcBef>
+                <a:spcPts val="500"/>
+              </a:spcBef>
+              <a:buFont typeface="Arial" panose="020B0604020202020204" pitchFamily="34" charset="0"/>
+              <a:buChar char="•"/>
+              <a:defRPr kumimoji="1" sz="1800" kern="1200">
+                <a:solidFill>
+                  <a:schemeClr val="tx1"/>
+                </a:solidFill>
+                <a:latin typeface="+mn-lt"/>
+                <a:ea typeface="+mn-ea"/>
+                <a:cs typeface="+mn-cs"/>
+              </a:defRPr>
+            </a:lvl5pPr>
+            <a:lvl6pPr marL="2514600" indent="-228600" algn="l" defTabSz="914400" rtl="0" eaLnBrk="1" latinLnBrk="0" hangingPunct="1">
+              <a:lnSpc>
+                <a:spcPct val="90000"/>
+              </a:lnSpc>
+              <a:spcBef>
+                <a:spcPts val="500"/>
+              </a:spcBef>
+              <a:buFont typeface="Arial" panose="020B0604020202020204" pitchFamily="34" charset="0"/>
+              <a:buChar char="•"/>
+              <a:defRPr kumimoji="1" sz="1800" kern="1200">
+                <a:solidFill>
+                  <a:schemeClr val="tx1"/>
+                </a:solidFill>
+                <a:latin typeface="+mn-lt"/>
+                <a:ea typeface="+mn-ea"/>
+                <a:cs typeface="+mn-cs"/>
+              </a:defRPr>
+            </a:lvl6pPr>
+            <a:lvl7pPr marL="2971800" indent="-228600" algn="l" defTabSz="914400" rtl="0" eaLnBrk="1" latinLnBrk="0" hangingPunct="1">
+              <a:lnSpc>
+                <a:spcPct val="90000"/>
+              </a:lnSpc>
+              <a:spcBef>
+                <a:spcPts val="500"/>
+              </a:spcBef>
+              <a:buFont typeface="Arial" panose="020B0604020202020204" pitchFamily="34" charset="0"/>
+              <a:buChar char="•"/>
+              <a:defRPr kumimoji="1" sz="1800" kern="1200">
+                <a:solidFill>
+                  <a:schemeClr val="tx1"/>
+                </a:solidFill>
+                <a:latin typeface="+mn-lt"/>
+                <a:ea typeface="+mn-ea"/>
+                <a:cs typeface="+mn-cs"/>
+              </a:defRPr>
+            </a:lvl7pPr>
+            <a:lvl8pPr marL="3429000" indent="-228600" algn="l" defTabSz="914400" rtl="0" eaLnBrk="1" latinLnBrk="0" hangingPunct="1">
+              <a:lnSpc>
+                <a:spcPct val="90000"/>
+              </a:lnSpc>
+              <a:spcBef>
+                <a:spcPts val="500"/>
+              </a:spcBef>
+              <a:buFont typeface="Arial" panose="020B0604020202020204" pitchFamily="34" charset="0"/>
+              <a:buChar char="•"/>
+              <a:defRPr kumimoji="1" sz="1800" kern="1200">
+                <a:solidFill>
+                  <a:schemeClr val="tx1"/>
+                </a:solidFill>
+                <a:latin typeface="+mn-lt"/>
+                <a:ea typeface="+mn-ea"/>
+                <a:cs typeface="+mn-cs"/>
+              </a:defRPr>
+            </a:lvl8pPr>
+            <a:lvl9pPr marL="3886200" indent="-228600" algn="l" defTabSz="914400" rtl="0" eaLnBrk="1" latinLnBrk="0" hangingPunct="1">
+              <a:lnSpc>
+                <a:spcPct val="90000"/>
+              </a:lnSpc>
+              <a:spcBef>
+                <a:spcPts val="500"/>
+              </a:spcBef>
+              <a:buFont typeface="Arial" panose="020B0604020202020204" pitchFamily="34" charset="0"/>
+              <a:buChar char="•"/>
+              <a:defRPr kumimoji="1" sz="1800" kern="1200">
+                <a:solidFill>
+                  <a:schemeClr val="tx1"/>
+                </a:solidFill>
+                <a:latin typeface="+mn-lt"/>
+                <a:ea typeface="+mn-ea"/>
+                <a:cs typeface="+mn-cs"/>
+              </a:defRPr>
+            </a:lvl9pPr>
+          </a:lstStyle>
+          <a:p>
+            <a:pPr marL="0" indent="0" algn="ctr">
+              <a:buFont typeface="Arial" panose="020B0604020202020204" pitchFamily="34" charset="0"/>
+              <a:buNone/>
+            </a:pPr>
+            <a:r>
+              <a:rPr lang="ja-JP" altLang="en-US"/>
+              <a:t>結果を見て，相関の低い説明変数を消す</a:t>
+            </a:r>
+          </a:p>
+        </p:txBody>
+      </p:sp>
+      <p:sp>
+        <p:nvSpPr>
+          <p:cNvPr id="6" name="曲折矢印 5">
+            <a:extLst>
+              <a:ext uri="{FF2B5EF4-FFF2-40B4-BE49-F238E27FC236}">
+                <a16:creationId xmlns:a16="http://schemas.microsoft.com/office/drawing/2014/main" id="{EBFE7238-4BA3-2AAB-971D-62E9A01D5F0B}"/>
+              </a:ext>
+            </a:extLst>
+          </p:cNvPr>
+          <p:cNvSpPr/>
+          <p:nvPr/>
+        </p:nvSpPr>
+        <p:spPr>
+          <a:xfrm rot="8100000">
+            <a:off x="6287390" y="3273976"/>
+            <a:ext cx="844062" cy="890954"/>
+          </a:xfrm>
+          <a:prstGeom prst="bentArrow">
+            <a:avLst/>
+          </a:prstGeom>
+        </p:spPr>
+        <p:style>
+          <a:lnRef idx="2">
+            <a:schemeClr val="accent1">
+              <a:shade val="15000"/>
+            </a:schemeClr>
+          </a:lnRef>
+          <a:fillRef idx="1">
+            <a:schemeClr val="accent1"/>
+          </a:fillRef>
+          <a:effectRef idx="0">
+            <a:schemeClr val="accent1"/>
+          </a:effectRef>
+          <a:fontRef idx="minor">
+            <a:schemeClr val="lt1"/>
+          </a:fontRef>
+        </p:style>
+        <p:txBody>
+          <a:bodyPr rtlCol="0" anchor="ctr"/>
+          <a:lstStyle/>
+          <a:p>
+            <a:pPr algn="ctr"/>
+            <a:endParaRPr kumimoji="1" lang="ja-JP" altLang="en-US">
+              <a:solidFill>
+                <a:schemeClr val="tx1"/>
+              </a:solidFill>
+            </a:endParaRPr>
+          </a:p>
+        </p:txBody>
+      </p:sp>
+      <p:sp>
+        <p:nvSpPr>
+          <p:cNvPr id="7" name="曲折矢印 6">
+            <a:extLst>
+              <a:ext uri="{FF2B5EF4-FFF2-40B4-BE49-F238E27FC236}">
+                <a16:creationId xmlns:a16="http://schemas.microsoft.com/office/drawing/2014/main" id="{1D5ED781-D534-F420-FE73-CB71090ED591}"/>
+              </a:ext>
+            </a:extLst>
+          </p:cNvPr>
+          <p:cNvSpPr/>
+          <p:nvPr/>
+        </p:nvSpPr>
+        <p:spPr>
+          <a:xfrm rot="8100000" flipH="1" flipV="1">
+            <a:off x="5060548" y="3190544"/>
+            <a:ext cx="844062" cy="890954"/>
+          </a:xfrm>
+          <a:prstGeom prst="bentArrow">
+            <a:avLst/>
+          </a:prstGeom>
+        </p:spPr>
+        <p:style>
+          <a:lnRef idx="2">
+            <a:schemeClr val="accent1">
+              <a:shade val="15000"/>
+            </a:schemeClr>
+          </a:lnRef>
+          <a:fillRef idx="1">
+            <a:schemeClr val="accent1"/>
+          </a:fillRef>
+          <a:effectRef idx="0">
+            <a:schemeClr val="accent1"/>
+          </a:effectRef>
+          <a:fontRef idx="minor">
+            <a:schemeClr val="lt1"/>
+          </a:fontRef>
+        </p:style>
+        <p:txBody>
+          <a:bodyPr rtlCol="0" anchor="ctr"/>
+          <a:lstStyle/>
+          <a:p>
+            <a:pPr algn="ctr"/>
+            <a:endParaRPr kumimoji="1" lang="ja-JP" altLang="en-US">
+              <a:solidFill>
+                <a:schemeClr val="tx1"/>
+              </a:solidFill>
+            </a:endParaRPr>
+          </a:p>
+        </p:txBody>
+      </p:sp>
+      <p:sp>
+        <p:nvSpPr>
+          <p:cNvPr id="9" name="コンテンツ プレースホルダー 2">
+            <a:extLst>
+              <a:ext uri="{FF2B5EF4-FFF2-40B4-BE49-F238E27FC236}">
+                <a16:creationId xmlns:a16="http://schemas.microsoft.com/office/drawing/2014/main" id="{02E72988-66AB-DEF3-52FC-44B90D69C521}"/>
+              </a:ext>
+            </a:extLst>
+          </p:cNvPr>
+          <p:cNvSpPr txBox="1">
+            <a:spLocks/>
+          </p:cNvSpPr>
+          <p:nvPr/>
+        </p:nvSpPr>
+        <p:spPr>
+          <a:xfrm>
+            <a:off x="1729493" y="5745382"/>
+            <a:ext cx="8733014" cy="681037"/>
+          </a:xfrm>
+          <a:prstGeom prst="rect">
+            <a:avLst/>
+          </a:prstGeom>
+        </p:spPr>
+        <p:txBody>
+          <a:bodyPr vert="horz" lIns="91440" tIns="45720" rIns="91440" bIns="45720" rtlCol="0">
+            <a:normAutofit/>
+          </a:bodyPr>
+          <a:lstStyle>
+            <a:lvl1pPr marL="228600" indent="-228600" algn="l" defTabSz="914400" rtl="0" eaLnBrk="1" latinLnBrk="0" hangingPunct="1">
+              <a:lnSpc>
+                <a:spcPct val="90000"/>
+              </a:lnSpc>
+              <a:spcBef>
+                <a:spcPts val="1000"/>
+              </a:spcBef>
+              <a:buFont typeface="Arial" panose="020B0604020202020204" pitchFamily="34" charset="0"/>
+              <a:buChar char="•"/>
+              <a:defRPr kumimoji="1" sz="2800" kern="1200">
+                <a:solidFill>
+                  <a:schemeClr val="tx1"/>
+                </a:solidFill>
+                <a:latin typeface="+mn-lt"/>
+                <a:ea typeface="+mn-ea"/>
+                <a:cs typeface="+mn-cs"/>
+              </a:defRPr>
+            </a:lvl1pPr>
+            <a:lvl2pPr marL="685800" indent="-228600" algn="l" defTabSz="914400" rtl="0" eaLnBrk="1" latinLnBrk="0" hangingPunct="1">
+              <a:lnSpc>
+                <a:spcPct val="90000"/>
+              </a:lnSpc>
+              <a:spcBef>
+                <a:spcPts val="500"/>
+              </a:spcBef>
+              <a:buFont typeface="Arial" panose="020B0604020202020204" pitchFamily="34" charset="0"/>
+              <a:buChar char="•"/>
+              <a:defRPr kumimoji="1" sz="2400" kern="1200">
+                <a:solidFill>
+                  <a:schemeClr val="tx1"/>
+                </a:solidFill>
+                <a:latin typeface="+mn-lt"/>
+                <a:ea typeface="+mn-ea"/>
+                <a:cs typeface="+mn-cs"/>
+              </a:defRPr>
+            </a:lvl2pPr>
+            <a:lvl3pPr marL="1143000" indent="-228600" algn="l" defTabSz="914400" rtl="0" eaLnBrk="1" latinLnBrk="0" hangingPunct="1">
+              <a:lnSpc>
+                <a:spcPct val="90000"/>
+              </a:lnSpc>
+              <a:spcBef>
+                <a:spcPts val="500"/>
+              </a:spcBef>
+              <a:buFont typeface="Arial" panose="020B0604020202020204" pitchFamily="34" charset="0"/>
+              <a:buChar char="•"/>
+              <a:defRPr kumimoji="1" sz="2000" kern="1200">
+                <a:solidFill>
+                  <a:schemeClr val="tx1"/>
+                </a:solidFill>
+                <a:latin typeface="+mn-lt"/>
+                <a:ea typeface="+mn-ea"/>
+                <a:cs typeface="+mn-cs"/>
+              </a:defRPr>
+            </a:lvl3pPr>
+            <a:lvl4pPr marL="1600200" indent="-228600" algn="l" defTabSz="914400" rtl="0" eaLnBrk="1" latinLnBrk="0" hangingPunct="1">
+              <a:lnSpc>
+                <a:spcPct val="90000"/>
+              </a:lnSpc>
+              <a:spcBef>
+                <a:spcPts val="500"/>
+              </a:spcBef>
+              <a:buFont typeface="Arial" panose="020B0604020202020204" pitchFamily="34" charset="0"/>
+              <a:buChar char="•"/>
+              <a:defRPr kumimoji="1" sz="1800" kern="1200">
+                <a:solidFill>
+                  <a:schemeClr val="tx1"/>
+                </a:solidFill>
+                <a:latin typeface="+mn-lt"/>
+                <a:ea typeface="+mn-ea"/>
+                <a:cs typeface="+mn-cs"/>
+              </a:defRPr>
+            </a:lvl4pPr>
+            <a:lvl5pPr marL="2057400" indent="-228600" algn="l" defTabSz="914400" rtl="0" eaLnBrk="1" latinLnBrk="0" hangingPunct="1">
+              <a:lnSpc>
+                <a:spcPct val="90000"/>
+              </a:lnSpc>
+              <a:spcBef>
+                <a:spcPts val="500"/>
+              </a:spcBef>
+              <a:buFont typeface="Arial" panose="020B0604020202020204" pitchFamily="34" charset="0"/>
+              <a:buChar char="•"/>
+              <a:defRPr kumimoji="1" sz="1800" kern="1200">
+                <a:solidFill>
+                  <a:schemeClr val="tx1"/>
+                </a:solidFill>
+                <a:latin typeface="+mn-lt"/>
+                <a:ea typeface="+mn-ea"/>
+                <a:cs typeface="+mn-cs"/>
+              </a:defRPr>
+            </a:lvl5pPr>
+            <a:lvl6pPr marL="2514600" indent="-228600" algn="l" defTabSz="914400" rtl="0" eaLnBrk="1" latinLnBrk="0" hangingPunct="1">
+              <a:lnSpc>
+                <a:spcPct val="90000"/>
+              </a:lnSpc>
+              <a:spcBef>
+                <a:spcPts val="500"/>
+              </a:spcBef>
+              <a:buFont typeface="Arial" panose="020B0604020202020204" pitchFamily="34" charset="0"/>
+              <a:buChar char="•"/>
+              <a:defRPr kumimoji="1" sz="1800" kern="1200">
+                <a:solidFill>
+                  <a:schemeClr val="tx1"/>
+                </a:solidFill>
+                <a:latin typeface="+mn-lt"/>
+                <a:ea typeface="+mn-ea"/>
+                <a:cs typeface="+mn-cs"/>
+              </a:defRPr>
+            </a:lvl6pPr>
+            <a:lvl7pPr marL="2971800" indent="-228600" algn="l" defTabSz="914400" rtl="0" eaLnBrk="1" latinLnBrk="0" hangingPunct="1">
+              <a:lnSpc>
+                <a:spcPct val="90000"/>
+              </a:lnSpc>
+              <a:spcBef>
+                <a:spcPts val="500"/>
+              </a:spcBef>
+              <a:buFont typeface="Arial" panose="020B0604020202020204" pitchFamily="34" charset="0"/>
+              <a:buChar char="•"/>
+              <a:defRPr kumimoji="1" sz="1800" kern="1200">
+                <a:solidFill>
+                  <a:schemeClr val="tx1"/>
+                </a:solidFill>
+                <a:latin typeface="+mn-lt"/>
+                <a:ea typeface="+mn-ea"/>
+                <a:cs typeface="+mn-cs"/>
+              </a:defRPr>
+            </a:lvl7pPr>
+            <a:lvl8pPr marL="3429000" indent="-228600" algn="l" defTabSz="914400" rtl="0" eaLnBrk="1" latinLnBrk="0" hangingPunct="1">
+              <a:lnSpc>
+                <a:spcPct val="90000"/>
+              </a:lnSpc>
+              <a:spcBef>
+                <a:spcPts val="500"/>
+              </a:spcBef>
+              <a:buFont typeface="Arial" panose="020B0604020202020204" pitchFamily="34" charset="0"/>
+              <a:buChar char="•"/>
+              <a:defRPr kumimoji="1" sz="1800" kern="1200">
+                <a:solidFill>
+                  <a:schemeClr val="tx1"/>
+                </a:solidFill>
+                <a:latin typeface="+mn-lt"/>
+                <a:ea typeface="+mn-ea"/>
+                <a:cs typeface="+mn-cs"/>
+              </a:defRPr>
+            </a:lvl8pPr>
+            <a:lvl9pPr marL="3886200" indent="-228600" algn="l" defTabSz="914400" rtl="0" eaLnBrk="1" latinLnBrk="0" hangingPunct="1">
+              <a:lnSpc>
+                <a:spcPct val="90000"/>
+              </a:lnSpc>
+              <a:spcBef>
+                <a:spcPts val="500"/>
+              </a:spcBef>
+              <a:buFont typeface="Arial" panose="020B0604020202020204" pitchFamily="34" charset="0"/>
+              <a:buChar char="•"/>
+              <a:defRPr kumimoji="1" sz="1800" kern="1200">
+                <a:solidFill>
+                  <a:schemeClr val="tx1"/>
+                </a:solidFill>
+                <a:latin typeface="+mn-lt"/>
+                <a:ea typeface="+mn-ea"/>
+                <a:cs typeface="+mn-cs"/>
+              </a:defRPr>
+            </a:lvl9pPr>
+          </a:lstStyle>
+          <a:p>
+            <a:pPr marL="0" indent="0" algn="ctr">
+              <a:buNone/>
+            </a:pPr>
+            <a:r>
+              <a:rPr lang="ja-JP" altLang="en-US">
+                <a:solidFill>
+                  <a:srgbClr val="000000"/>
+                </a:solidFill>
+                <a:latin typeface="Yu Gothic" panose="020B0400000000000000" pitchFamily="34" charset="-128"/>
+                <a:ea typeface="Yu Gothic" panose="020B0400000000000000" pitchFamily="34" charset="-128"/>
+              </a:rPr>
+              <a:t>→最終的に計</a:t>
+            </a:r>
+            <a:r>
+              <a:rPr lang="en-US" altLang="ja-JP" dirty="0">
+                <a:solidFill>
+                  <a:srgbClr val="000000"/>
+                </a:solidFill>
+                <a:latin typeface="Yu Gothic" panose="020B0400000000000000" pitchFamily="34" charset="-128"/>
+                <a:ea typeface="Yu Gothic" panose="020B0400000000000000" pitchFamily="34" charset="-128"/>
+              </a:rPr>
+              <a:t>54</a:t>
+            </a:r>
+            <a:r>
+              <a:rPr lang="ja-JP" altLang="en-US">
+                <a:solidFill>
+                  <a:srgbClr val="000000"/>
+                </a:solidFill>
+                <a:latin typeface="Yu Gothic" panose="020B0400000000000000" pitchFamily="34" charset="-128"/>
+                <a:ea typeface="Yu Gothic" panose="020B0400000000000000" pitchFamily="34" charset="-128"/>
+              </a:rPr>
+              <a:t>回の重回帰分析を試行</a:t>
+            </a:r>
+            <a:endParaRPr lang="en-US" altLang="ja-JP" dirty="0">
+              <a:latin typeface="Yu Gothic" panose="020B0400000000000000" pitchFamily="34" charset="-128"/>
+              <a:ea typeface="Yu Gothic" panose="020B0400000000000000" pitchFamily="34" charset="-128"/>
+            </a:endParaRPr>
           </a:p>
         </p:txBody>
       </p:sp>

--- a/プレゼンテーション.pptx
+++ b/プレゼンテーション.pptx
@@ -4105,10 +4105,9 @@
           <a:lstStyle/>
           <a:p>
             <a:r>
-              <a:rPr kumimoji="1" lang="en-US" altLang="ja-JP" dirty="0" err="1"/>
-              <a:t>aaaaaa</a:t>
-            </a:r>
-            <a:endParaRPr kumimoji="1" lang="ja-JP" altLang="en-US"/>
+              <a:rPr kumimoji="1" lang="ja-JP" altLang="en-US"/>
+              <a:t>人口密度</a:t>
+            </a:r>
           </a:p>
         </p:txBody>
       </p:sp>

--- a/プレゼンテーション.pptx
+++ b/プレゼンテーション.pptx
@@ -718,7 +718,7 @@
           <a:p>
             <a:fld id="{164B3D7D-398B-0445-A1E4-13E0BD7D0987}" type="datetimeFigureOut">
               <a:rPr kumimoji="1" lang="ja-JP" altLang="en-US" smtClean="0"/>
-              <a:t>2026/7/6</a:t>
+              <a:t>2026/7/2</a:t>
             </a:fld>
             <a:endParaRPr kumimoji="1" lang="ja-JP" altLang="en-US"/>
           </a:p>
@@ -948,7 +948,7 @@
           <a:p>
             <a:fld id="{164B3D7D-398B-0445-A1E4-13E0BD7D0987}" type="datetimeFigureOut">
               <a:rPr kumimoji="1" lang="ja-JP" altLang="en-US" smtClean="0"/>
-              <a:t>2026/7/6</a:t>
+              <a:t>2026/7/2</a:t>
             </a:fld>
             <a:endParaRPr kumimoji="1" lang="ja-JP" altLang="en-US"/>
           </a:p>
@@ -1188,7 +1188,7 @@
           <a:p>
             <a:fld id="{164B3D7D-398B-0445-A1E4-13E0BD7D0987}" type="datetimeFigureOut">
               <a:rPr kumimoji="1" lang="ja-JP" altLang="en-US" smtClean="0"/>
-              <a:t>2026/7/6</a:t>
+              <a:t>2026/7/2</a:t>
             </a:fld>
             <a:endParaRPr kumimoji="1" lang="ja-JP" altLang="en-US"/>
           </a:p>
@@ -1425,7 +1425,7 @@
           <a:p>
             <a:fld id="{164B3D7D-398B-0445-A1E4-13E0BD7D0987}" type="datetimeFigureOut">
               <a:rPr kumimoji="1" lang="ja-JP" altLang="en-US" smtClean="0"/>
-              <a:t>2026/7/6</a:t>
+              <a:t>2026/7/2</a:t>
             </a:fld>
             <a:endParaRPr kumimoji="1" lang="ja-JP" altLang="en-US"/>
           </a:p>
@@ -1703,7 +1703,7 @@
           <a:p>
             <a:fld id="{164B3D7D-398B-0445-A1E4-13E0BD7D0987}" type="datetimeFigureOut">
               <a:rPr kumimoji="1" lang="ja-JP" altLang="en-US" smtClean="0"/>
-              <a:t>2026/7/6</a:t>
+              <a:t>2026/7/2</a:t>
             </a:fld>
             <a:endParaRPr kumimoji="1" lang="ja-JP" altLang="en-US"/>
           </a:p>
@@ -2032,7 +2032,7 @@
           <a:p>
             <a:fld id="{164B3D7D-398B-0445-A1E4-13E0BD7D0987}" type="datetimeFigureOut">
               <a:rPr kumimoji="1" lang="ja-JP" altLang="en-US" smtClean="0"/>
-              <a:t>2026/7/6</a:t>
+              <a:t>2026/7/2</a:t>
             </a:fld>
             <a:endParaRPr kumimoji="1" lang="ja-JP" altLang="en-US"/>
           </a:p>
@@ -2508,7 +2508,7 @@
           <a:p>
             <a:fld id="{164B3D7D-398B-0445-A1E4-13E0BD7D0987}" type="datetimeFigureOut">
               <a:rPr kumimoji="1" lang="ja-JP" altLang="en-US" smtClean="0"/>
-              <a:t>2026/7/6</a:t>
+              <a:t>2026/7/2</a:t>
             </a:fld>
             <a:endParaRPr kumimoji="1" lang="ja-JP" altLang="en-US"/>
           </a:p>
@@ -2649,7 +2649,7 @@
           <a:p>
             <a:fld id="{164B3D7D-398B-0445-A1E4-13E0BD7D0987}" type="datetimeFigureOut">
               <a:rPr kumimoji="1" lang="ja-JP" altLang="en-US" smtClean="0"/>
-              <a:t>2026/7/6</a:t>
+              <a:t>2026/7/2</a:t>
             </a:fld>
             <a:endParaRPr kumimoji="1" lang="ja-JP" altLang="en-US"/>
           </a:p>
@@ -2762,7 +2762,7 @@
           <a:p>
             <a:fld id="{164B3D7D-398B-0445-A1E4-13E0BD7D0987}" type="datetimeFigureOut">
               <a:rPr kumimoji="1" lang="ja-JP" altLang="en-US" smtClean="0"/>
-              <a:t>2026/7/6</a:t>
+              <a:t>2026/7/2</a:t>
             </a:fld>
             <a:endParaRPr kumimoji="1" lang="ja-JP" altLang="en-US"/>
           </a:p>
@@ -3105,7 +3105,7 @@
           <a:p>
             <a:fld id="{164B3D7D-398B-0445-A1E4-13E0BD7D0987}" type="datetimeFigureOut">
               <a:rPr kumimoji="1" lang="ja-JP" altLang="en-US" smtClean="0"/>
-              <a:t>2026/7/6</a:t>
+              <a:t>2026/7/2</a:t>
             </a:fld>
             <a:endParaRPr kumimoji="1" lang="ja-JP" altLang="en-US"/>
           </a:p>
@@ -3393,7 +3393,7 @@
           <a:p>
             <a:fld id="{164B3D7D-398B-0445-A1E4-13E0BD7D0987}" type="datetimeFigureOut">
               <a:rPr kumimoji="1" lang="ja-JP" altLang="en-US" smtClean="0"/>
-              <a:t>2026/7/6</a:t>
+              <a:t>2026/7/2</a:t>
             </a:fld>
             <a:endParaRPr kumimoji="1" lang="ja-JP" altLang="en-US"/>
           </a:p>
@@ -3666,7 +3666,7 @@
           <a:p>
             <a:fld id="{164B3D7D-398B-0445-A1E4-13E0BD7D0987}" type="datetimeFigureOut">
               <a:rPr kumimoji="1" lang="ja-JP" altLang="en-US" smtClean="0"/>
-              <a:t>2026/7/6</a:t>
+              <a:t>2026/7/2</a:t>
             </a:fld>
             <a:endParaRPr kumimoji="1" lang="ja-JP" altLang="en-US"/>
           </a:p>
@@ -4105,9 +4105,10 @@
           <a:lstStyle/>
           <a:p>
             <a:r>
-              <a:rPr kumimoji="1" lang="ja-JP" altLang="en-US"/>
-              <a:t>人口密度</a:t>
-            </a:r>
+              <a:rPr kumimoji="1" lang="en-US" altLang="ja-JP" dirty="0" err="1"/>
+              <a:t>aaaaaa</a:t>
+            </a:r>
+            <a:endParaRPr kumimoji="1" lang="ja-JP" altLang="en-US"/>
           </a:p>
         </p:txBody>
       </p:sp>
@@ -5285,16 +5286,10 @@
           <a:lstStyle/>
           <a:p>
             <a:r>
-              <a:rPr kumimoji="1" lang="ja-JP" altLang="en-US" sz="2400">
-                <a:latin typeface="Yu Gothic" panose="020B0400000000000000" pitchFamily="34" charset="-128"/>
-                <a:ea typeface="Yu Gothic" panose="020B0400000000000000" pitchFamily="34" charset="-128"/>
-              </a:rPr>
+              <a:rPr kumimoji="1" lang="ja-JP" altLang="en-US" sz="2400"/>
               <a:t>外国人人口</a:t>
             </a:r>
-            <a:endParaRPr lang="en-US" altLang="ja-JP" sz="2400" dirty="0">
-              <a:latin typeface="Yu Gothic" panose="020B0400000000000000" pitchFamily="34" charset="-128"/>
-              <a:ea typeface="Yu Gothic" panose="020B0400000000000000" pitchFamily="34" charset="-128"/>
-            </a:endParaRPr>
+            <a:endParaRPr lang="en-US" altLang="ja-JP" sz="2400" dirty="0"/>
           </a:p>
           <a:p>
             <a:r>
@@ -5302,8 +5297,7 @@
                 <a:solidFill>
                   <a:srgbClr val="000000"/>
                 </a:solidFill>
-                <a:latin typeface="Yu Gothic" panose="020B0400000000000000" pitchFamily="34" charset="-128"/>
-                <a:ea typeface="Yu Gothic" panose="020B0400000000000000" pitchFamily="34" charset="-128"/>
+                <a:latin typeface="Gen Interface JP"/>
               </a:rPr>
               <a:t>事業所数（民営）（農業、林業）</a:t>
             </a:r>
@@ -5311,8 +5305,7 @@
               <a:solidFill>
                 <a:srgbClr val="000000"/>
               </a:solidFill>
-              <a:latin typeface="Yu Gothic" panose="020B0400000000000000" pitchFamily="34" charset="-128"/>
-              <a:ea typeface="Yu Gothic" panose="020B0400000000000000" pitchFamily="34" charset="-128"/>
+              <a:latin typeface="Gen Interface JP"/>
             </a:endParaRPr>
           </a:p>
           <a:p>
@@ -5321,8 +5314,7 @@
                 <a:solidFill>
                   <a:srgbClr val="000000"/>
                 </a:solidFill>
-                <a:latin typeface="Yu Gothic" panose="020B0400000000000000" pitchFamily="34" charset="-128"/>
-                <a:ea typeface="Yu Gothic" panose="020B0400000000000000" pitchFamily="34" charset="-128"/>
+                <a:latin typeface="Gen Interface JP"/>
               </a:rPr>
               <a:t>歳出</a:t>
             </a:r>
@@ -5331,8 +5323,7 @@
                 <a:solidFill>
                   <a:srgbClr val="000000"/>
                 </a:solidFill>
-                <a:latin typeface="Yu Gothic" panose="020B0400000000000000" pitchFamily="34" charset="-128"/>
-                <a:ea typeface="Yu Gothic" panose="020B0400000000000000" pitchFamily="34" charset="-128"/>
+                <a:latin typeface="Gen Interface JP"/>
               </a:rPr>
               <a:t>決算総額（市町村財政）</a:t>
             </a:r>
@@ -5340,8 +5331,7 @@
               <a:solidFill>
                 <a:srgbClr val="000000"/>
               </a:solidFill>
-              <a:latin typeface="Yu Gothic" panose="020B0400000000000000" pitchFamily="34" charset="-128"/>
-              <a:ea typeface="Yu Gothic" panose="020B0400000000000000" pitchFamily="34" charset="-128"/>
+              <a:latin typeface="Gen Interface JP"/>
             </a:endParaRPr>
           </a:p>
           <a:p>
@@ -5350,8 +5340,7 @@
                 <a:solidFill>
                   <a:srgbClr val="000000"/>
                 </a:solidFill>
-                <a:latin typeface="Yu Gothic" panose="020B0400000000000000" pitchFamily="34" charset="-128"/>
-                <a:ea typeface="Yu Gothic" panose="020B0400000000000000" pitchFamily="34" charset="-128"/>
+                <a:latin typeface="Gen Interface JP"/>
               </a:rPr>
               <a:t>民生費（市町村財政）</a:t>
             </a:r>
@@ -5359,8 +5348,7 @@
               <a:solidFill>
                 <a:srgbClr val="000000"/>
               </a:solidFill>
-              <a:latin typeface="Yu Gothic" panose="020B0400000000000000" pitchFamily="34" charset="-128"/>
-              <a:ea typeface="Yu Gothic" panose="020B0400000000000000" pitchFamily="34" charset="-128"/>
+              <a:latin typeface="Gen Interface JP"/>
             </a:endParaRPr>
           </a:p>
           <a:p>
@@ -5369,8 +5357,7 @@
                 <a:solidFill>
                   <a:srgbClr val="000000"/>
                 </a:solidFill>
-                <a:latin typeface="Yu Gothic" panose="020B0400000000000000" pitchFamily="34" charset="-128"/>
-                <a:ea typeface="Yu Gothic" panose="020B0400000000000000" pitchFamily="34" charset="-128"/>
+                <a:latin typeface="Gen Interface JP"/>
               </a:rPr>
               <a:t>幼稚園在園者数</a:t>
             </a:r>
@@ -5378,8 +5365,7 @@
               <a:solidFill>
                 <a:srgbClr val="000000"/>
               </a:solidFill>
-              <a:latin typeface="Yu Gothic" panose="020B0400000000000000" pitchFamily="34" charset="-128"/>
-              <a:ea typeface="Yu Gothic" panose="020B0400000000000000" pitchFamily="34" charset="-128"/>
+              <a:latin typeface="Gen Interface JP"/>
             </a:endParaRPr>
           </a:p>
           <a:p>
@@ -5388,8 +5374,7 @@
                 <a:solidFill>
                   <a:srgbClr val="000000"/>
                 </a:solidFill>
-                <a:latin typeface="Yu Gothic" panose="020B0400000000000000" pitchFamily="34" charset="-128"/>
-                <a:ea typeface="Yu Gothic" panose="020B0400000000000000" pitchFamily="34" charset="-128"/>
+                <a:latin typeface="Gen Interface JP"/>
               </a:rPr>
               <a:t>高等学校生徒数</a:t>
             </a:r>
@@ -5397,8 +5382,7 @@
               <a:solidFill>
                 <a:srgbClr val="000000"/>
               </a:solidFill>
-              <a:latin typeface="Yu Gothic" panose="020B0400000000000000" pitchFamily="34" charset="-128"/>
-              <a:ea typeface="Yu Gothic" panose="020B0400000000000000" pitchFamily="34" charset="-128"/>
+              <a:latin typeface="Gen Interface JP"/>
             </a:endParaRPr>
           </a:p>
           <a:p>
@@ -5407,8 +5391,7 @@
                 <a:solidFill>
                   <a:srgbClr val="000000"/>
                 </a:solidFill>
-                <a:latin typeface="Yu Gothic" panose="020B0400000000000000" pitchFamily="34" charset="-128"/>
-                <a:ea typeface="Yu Gothic" panose="020B0400000000000000" pitchFamily="34" charset="-128"/>
+                <a:latin typeface="Gen Interface JP"/>
               </a:rPr>
               <a:t>第３次産業就業者数</a:t>
             </a:r>
@@ -5416,8 +5399,7 @@
               <a:solidFill>
                 <a:srgbClr val="000000"/>
               </a:solidFill>
-              <a:latin typeface="Yu Gothic" panose="020B0400000000000000" pitchFamily="34" charset="-128"/>
-              <a:ea typeface="Yu Gothic" panose="020B0400000000000000" pitchFamily="34" charset="-128"/>
+              <a:latin typeface="Gen Interface JP"/>
             </a:endParaRPr>
           </a:p>
           <a:p>
@@ -5426,8 +5408,7 @@
                 <a:solidFill>
                   <a:srgbClr val="000000"/>
                 </a:solidFill>
-                <a:latin typeface="Yu Gothic" panose="020B0400000000000000" pitchFamily="34" charset="-128"/>
-                <a:ea typeface="Yu Gothic" panose="020B0400000000000000" pitchFamily="34" charset="-128"/>
+                <a:latin typeface="Gen Interface JP"/>
               </a:rPr>
               <a:t>p15歳未満人口</a:t>
             </a:r>
@@ -5435,8 +5416,7 @@
               <a:solidFill>
                 <a:srgbClr val="000000"/>
               </a:solidFill>
-              <a:latin typeface="Yu Gothic" panose="020B0400000000000000" pitchFamily="34" charset="-128"/>
-              <a:ea typeface="Yu Gothic" panose="020B0400000000000000" pitchFamily="34" charset="-128"/>
+              <a:latin typeface="Gen Interface JP"/>
             </a:endParaRPr>
           </a:p>
         </p:txBody>
@@ -5638,8 +5618,7 @@
                 <a:solidFill>
                   <a:srgbClr val="000000"/>
                 </a:solidFill>
-                <a:latin typeface="Yu Gothic" panose="020B0400000000000000" pitchFamily="34" charset="-128"/>
-                <a:ea typeface="Yu Gothic" panose="020B0400000000000000" pitchFamily="34" charset="-128"/>
+                <a:latin typeface="Gen Interface JP"/>
               </a:rPr>
               <a:t>p65歳以上の世帯員のいる核家族世帯数</a:t>
             </a:r>
@@ -5647,8 +5626,7 @@
               <a:solidFill>
                 <a:srgbClr val="000000"/>
               </a:solidFill>
-              <a:latin typeface="Yu Gothic" panose="020B0400000000000000" pitchFamily="34" charset="-128"/>
-              <a:ea typeface="Yu Gothic" panose="020B0400000000000000" pitchFamily="34" charset="-128"/>
+              <a:latin typeface="Gen Interface JP"/>
             </a:endParaRPr>
           </a:p>
           <a:p>
@@ -5657,8 +5635,7 @@
                 <a:solidFill>
                   <a:srgbClr val="000000"/>
                 </a:solidFill>
-                <a:latin typeface="Yu Gothic" panose="020B0400000000000000" pitchFamily="34" charset="-128"/>
-                <a:ea typeface="Yu Gothic" panose="020B0400000000000000" pitchFamily="34" charset="-128"/>
+                <a:latin typeface="Gen Interface JP"/>
               </a:rPr>
               <a:t>p従業者数（民営）（卸売業、小売業）p農家数（自給的農家）</a:t>
             </a:r>
@@ -5666,8 +5643,7 @@
               <a:solidFill>
                 <a:srgbClr val="000000"/>
               </a:solidFill>
-              <a:latin typeface="Yu Gothic" panose="020B0400000000000000" pitchFamily="34" charset="-128"/>
-              <a:ea typeface="Yu Gothic" panose="020B0400000000000000" pitchFamily="34" charset="-128"/>
+              <a:latin typeface="Gen Interface JP"/>
             </a:endParaRPr>
           </a:p>
           <a:p>
@@ -5676,8 +5652,7 @@
                 <a:solidFill>
                   <a:srgbClr val="000000"/>
                 </a:solidFill>
-                <a:latin typeface="Yu Gothic" panose="020B0400000000000000" pitchFamily="34" charset="-128"/>
-                <a:ea typeface="Yu Gothic" panose="020B0400000000000000" pitchFamily="34" charset="-128"/>
+                <a:latin typeface="Gen Interface JP"/>
               </a:rPr>
               <a:t>p従業者数（民営）（医療、福祉）</a:t>
             </a:r>
@@ -5685,8 +5660,7 @@
               <a:solidFill>
                 <a:srgbClr val="000000"/>
               </a:solidFill>
-              <a:latin typeface="Yu Gothic" panose="020B0400000000000000" pitchFamily="34" charset="-128"/>
-              <a:ea typeface="Yu Gothic" panose="020B0400000000000000" pitchFamily="34" charset="-128"/>
+              <a:latin typeface="Gen Interface JP"/>
             </a:endParaRPr>
           </a:p>
           <a:p>
@@ -5695,8 +5669,7 @@
                 <a:solidFill>
                   <a:srgbClr val="000000"/>
                 </a:solidFill>
-                <a:latin typeface="Yu Gothic" panose="020B0400000000000000" pitchFamily="34" charset="-128"/>
-                <a:ea typeface="Yu Gothic" panose="020B0400000000000000" pitchFamily="34" charset="-128"/>
+                <a:latin typeface="Gen Interface JP"/>
               </a:rPr>
               <a:t>p歳出決算総額（市町村財政）</a:t>
             </a:r>
@@ -5704,8 +5677,7 @@
               <a:solidFill>
                 <a:srgbClr val="000000"/>
               </a:solidFill>
-              <a:latin typeface="Yu Gothic" panose="020B0400000000000000" pitchFamily="34" charset="-128"/>
-              <a:ea typeface="Yu Gothic" panose="020B0400000000000000" pitchFamily="34" charset="-128"/>
+              <a:latin typeface="Gen Interface JP"/>
             </a:endParaRPr>
           </a:p>
           <a:p>
@@ -5714,8 +5686,7 @@
                 <a:solidFill>
                   <a:srgbClr val="000000"/>
                 </a:solidFill>
-                <a:latin typeface="Yu Gothic" panose="020B0400000000000000" pitchFamily="34" charset="-128"/>
-                <a:ea typeface="Yu Gothic" panose="020B0400000000000000" pitchFamily="34" charset="-128"/>
+                <a:latin typeface="Gen Interface JP"/>
               </a:rPr>
               <a:t>p第１次産業就業者数</a:t>
             </a:r>
@@ -5723,8 +5694,7 @@
               <a:solidFill>
                 <a:srgbClr val="000000"/>
               </a:solidFill>
-              <a:latin typeface="Yu Gothic" panose="020B0400000000000000" pitchFamily="34" charset="-128"/>
-              <a:ea typeface="Yu Gothic" panose="020B0400000000000000" pitchFamily="34" charset="-128"/>
+              <a:latin typeface="Gen Interface JP"/>
             </a:endParaRPr>
           </a:p>
           <a:p>
@@ -5733,8 +5703,7 @@
                 <a:solidFill>
                   <a:srgbClr val="000000"/>
                 </a:solidFill>
-                <a:latin typeface="Yu Gothic" panose="020B0400000000000000" pitchFamily="34" charset="-128"/>
-                <a:ea typeface="Yu Gothic" panose="020B0400000000000000" pitchFamily="34" charset="-128"/>
+                <a:latin typeface="Gen Interface JP"/>
               </a:rPr>
               <a:t>p第２次産業就業者数</a:t>
             </a:r>
@@ -5742,8 +5711,7 @@
               <a:solidFill>
                 <a:srgbClr val="000000"/>
               </a:solidFill>
-              <a:latin typeface="Yu Gothic" panose="020B0400000000000000" pitchFamily="34" charset="-128"/>
-              <a:ea typeface="Yu Gothic" panose="020B0400000000000000" pitchFamily="34" charset="-128"/>
+              <a:latin typeface="Gen Interface JP"/>
             </a:endParaRPr>
           </a:p>
           <a:p>
@@ -5752,8 +5720,7 @@
                 <a:solidFill>
                   <a:srgbClr val="000000"/>
                 </a:solidFill>
-                <a:latin typeface="Yu Gothic" panose="020B0400000000000000" pitchFamily="34" charset="-128"/>
-                <a:ea typeface="Yu Gothic" panose="020B0400000000000000" pitchFamily="34" charset="-128"/>
+                <a:latin typeface="Gen Interface JP"/>
               </a:rPr>
               <a:t>p第３次産業就業者数</a:t>
             </a:r>
@@ -5761,8 +5728,7 @@
               <a:solidFill>
                 <a:srgbClr val="000000"/>
               </a:solidFill>
-              <a:latin typeface="Yu Gothic" panose="020B0400000000000000" pitchFamily="34" charset="-128"/>
-              <a:ea typeface="Yu Gothic" panose="020B0400000000000000" pitchFamily="34" charset="-128"/>
+              <a:latin typeface="Gen Interface JP"/>
             </a:endParaRPr>
           </a:p>
           <a:p>
@@ -5771,257 +5737,11 @@
                 <a:solidFill>
                   <a:srgbClr val="000000"/>
                 </a:solidFill>
-                <a:latin typeface="Yu Gothic" panose="020B0400000000000000" pitchFamily="34" charset="-128"/>
-                <a:ea typeface="Yu Gothic" panose="020B0400000000000000" pitchFamily="34" charset="-128"/>
+                <a:latin typeface="Gen Interface JP"/>
               </a:rPr>
               <a:t>p小売店数</a:t>
             </a:r>
-            <a:endParaRPr lang="en-US" altLang="ja-JP" sz="2400" dirty="0">
-              <a:latin typeface="Yu Gothic" panose="020B0400000000000000" pitchFamily="34" charset="-128"/>
-              <a:ea typeface="Yu Gothic" panose="020B0400000000000000" pitchFamily="34" charset="-128"/>
-            </a:endParaRPr>
-          </a:p>
-        </p:txBody>
-      </p:sp>
-      <p:sp>
-        <p:nvSpPr>
-          <p:cNvPr id="5" name="コンテンツ プレースホルダー 2">
-            <a:extLst>
-              <a:ext uri="{FF2B5EF4-FFF2-40B4-BE49-F238E27FC236}">
-                <a16:creationId xmlns:a16="http://schemas.microsoft.com/office/drawing/2014/main" id="{82C1FBE7-44F8-8215-84DB-961300CB5C8E}"/>
-              </a:ext>
-            </a:extLst>
-          </p:cNvPr>
-          <p:cNvSpPr txBox="1">
-            <a:spLocks/>
-          </p:cNvSpPr>
-          <p:nvPr/>
-        </p:nvSpPr>
-        <p:spPr>
-          <a:xfrm>
-            <a:off x="8305800" y="6253878"/>
-            <a:ext cx="3305229" cy="681037"/>
-          </a:xfrm>
-          <a:prstGeom prst="rect">
-            <a:avLst/>
-          </a:prstGeom>
-        </p:spPr>
-        <p:txBody>
-          <a:bodyPr vert="horz" lIns="91440" tIns="45720" rIns="91440" bIns="45720" rtlCol="0">
-            <a:normAutofit/>
-          </a:bodyPr>
-          <a:lstStyle>
-            <a:lvl1pPr marL="228600" indent="-228600" algn="l" defTabSz="914400" rtl="0" eaLnBrk="1" latinLnBrk="0" hangingPunct="1">
-              <a:lnSpc>
-                <a:spcPct val="90000"/>
-              </a:lnSpc>
-              <a:spcBef>
-                <a:spcPts val="1000"/>
-              </a:spcBef>
-              <a:buFont typeface="Arial" panose="020B0604020202020204" pitchFamily="34" charset="0"/>
-              <a:buChar char="•"/>
-              <a:defRPr kumimoji="1" sz="2800" kern="1200">
-                <a:solidFill>
-                  <a:schemeClr val="tx1"/>
-                </a:solidFill>
-                <a:latin typeface="+mn-lt"/>
-                <a:ea typeface="+mn-ea"/>
-                <a:cs typeface="+mn-cs"/>
-              </a:defRPr>
-            </a:lvl1pPr>
-            <a:lvl2pPr marL="685800" indent="-228600" algn="l" defTabSz="914400" rtl="0" eaLnBrk="1" latinLnBrk="0" hangingPunct="1">
-              <a:lnSpc>
-                <a:spcPct val="90000"/>
-              </a:lnSpc>
-              <a:spcBef>
-                <a:spcPts val="500"/>
-              </a:spcBef>
-              <a:buFont typeface="Arial" panose="020B0604020202020204" pitchFamily="34" charset="0"/>
-              <a:buChar char="•"/>
-              <a:defRPr kumimoji="1" sz="2400" kern="1200">
-                <a:solidFill>
-                  <a:schemeClr val="tx1"/>
-                </a:solidFill>
-                <a:latin typeface="+mn-lt"/>
-                <a:ea typeface="+mn-ea"/>
-                <a:cs typeface="+mn-cs"/>
-              </a:defRPr>
-            </a:lvl2pPr>
-            <a:lvl3pPr marL="1143000" indent="-228600" algn="l" defTabSz="914400" rtl="0" eaLnBrk="1" latinLnBrk="0" hangingPunct="1">
-              <a:lnSpc>
-                <a:spcPct val="90000"/>
-              </a:lnSpc>
-              <a:spcBef>
-                <a:spcPts val="500"/>
-              </a:spcBef>
-              <a:buFont typeface="Arial" panose="020B0604020202020204" pitchFamily="34" charset="0"/>
-              <a:buChar char="•"/>
-              <a:defRPr kumimoji="1" sz="2000" kern="1200">
-                <a:solidFill>
-                  <a:schemeClr val="tx1"/>
-                </a:solidFill>
-                <a:latin typeface="+mn-lt"/>
-                <a:ea typeface="+mn-ea"/>
-                <a:cs typeface="+mn-cs"/>
-              </a:defRPr>
-            </a:lvl3pPr>
-            <a:lvl4pPr marL="1600200" indent="-228600" algn="l" defTabSz="914400" rtl="0" eaLnBrk="1" latinLnBrk="0" hangingPunct="1">
-              <a:lnSpc>
-                <a:spcPct val="90000"/>
-              </a:lnSpc>
-              <a:spcBef>
-                <a:spcPts val="500"/>
-              </a:spcBef>
-              <a:buFont typeface="Arial" panose="020B0604020202020204" pitchFamily="34" charset="0"/>
-              <a:buChar char="•"/>
-              <a:defRPr kumimoji="1" sz="1800" kern="1200">
-                <a:solidFill>
-                  <a:schemeClr val="tx1"/>
-                </a:solidFill>
-                <a:latin typeface="+mn-lt"/>
-                <a:ea typeface="+mn-ea"/>
-                <a:cs typeface="+mn-cs"/>
-              </a:defRPr>
-            </a:lvl4pPr>
-            <a:lvl5pPr marL="2057400" indent="-228600" algn="l" defTabSz="914400" rtl="0" eaLnBrk="1" latinLnBrk="0" hangingPunct="1">
-              <a:lnSpc>
-                <a:spcPct val="90000"/>
-              </a:lnSpc>
-              <a:spcBef>
-                <a:spcPts val="500"/>
-              </a:spcBef>
-              <a:buFont typeface="Arial" panose="020B0604020202020204" pitchFamily="34" charset="0"/>
-              <a:buChar char="•"/>
-              <a:defRPr kumimoji="1" sz="1800" kern="1200">
-                <a:solidFill>
-                  <a:schemeClr val="tx1"/>
-                </a:solidFill>
-                <a:latin typeface="+mn-lt"/>
-                <a:ea typeface="+mn-ea"/>
-                <a:cs typeface="+mn-cs"/>
-              </a:defRPr>
-            </a:lvl5pPr>
-            <a:lvl6pPr marL="2514600" indent="-228600" algn="l" defTabSz="914400" rtl="0" eaLnBrk="1" latinLnBrk="0" hangingPunct="1">
-              <a:lnSpc>
-                <a:spcPct val="90000"/>
-              </a:lnSpc>
-              <a:spcBef>
-                <a:spcPts val="500"/>
-              </a:spcBef>
-              <a:buFont typeface="Arial" panose="020B0604020202020204" pitchFamily="34" charset="0"/>
-              <a:buChar char="•"/>
-              <a:defRPr kumimoji="1" sz="1800" kern="1200">
-                <a:solidFill>
-                  <a:schemeClr val="tx1"/>
-                </a:solidFill>
-                <a:latin typeface="+mn-lt"/>
-                <a:ea typeface="+mn-ea"/>
-                <a:cs typeface="+mn-cs"/>
-              </a:defRPr>
-            </a:lvl6pPr>
-            <a:lvl7pPr marL="2971800" indent="-228600" algn="l" defTabSz="914400" rtl="0" eaLnBrk="1" latinLnBrk="0" hangingPunct="1">
-              <a:lnSpc>
-                <a:spcPct val="90000"/>
-              </a:lnSpc>
-              <a:spcBef>
-                <a:spcPts val="500"/>
-              </a:spcBef>
-              <a:buFont typeface="Arial" panose="020B0604020202020204" pitchFamily="34" charset="0"/>
-              <a:buChar char="•"/>
-              <a:defRPr kumimoji="1" sz="1800" kern="1200">
-                <a:solidFill>
-                  <a:schemeClr val="tx1"/>
-                </a:solidFill>
-                <a:latin typeface="+mn-lt"/>
-                <a:ea typeface="+mn-ea"/>
-                <a:cs typeface="+mn-cs"/>
-              </a:defRPr>
-            </a:lvl7pPr>
-            <a:lvl8pPr marL="3429000" indent="-228600" algn="l" defTabSz="914400" rtl="0" eaLnBrk="1" latinLnBrk="0" hangingPunct="1">
-              <a:lnSpc>
-                <a:spcPct val="90000"/>
-              </a:lnSpc>
-              <a:spcBef>
-                <a:spcPts val="500"/>
-              </a:spcBef>
-              <a:buFont typeface="Arial" panose="020B0604020202020204" pitchFamily="34" charset="0"/>
-              <a:buChar char="•"/>
-              <a:defRPr kumimoji="1" sz="1800" kern="1200">
-                <a:solidFill>
-                  <a:schemeClr val="tx1"/>
-                </a:solidFill>
-                <a:latin typeface="+mn-lt"/>
-                <a:ea typeface="+mn-ea"/>
-                <a:cs typeface="+mn-cs"/>
-              </a:defRPr>
-            </a:lvl8pPr>
-            <a:lvl9pPr marL="3886200" indent="-228600" algn="l" defTabSz="914400" rtl="0" eaLnBrk="1" latinLnBrk="0" hangingPunct="1">
-              <a:lnSpc>
-                <a:spcPct val="90000"/>
-              </a:lnSpc>
-              <a:spcBef>
-                <a:spcPts val="500"/>
-              </a:spcBef>
-              <a:buFont typeface="Arial" panose="020B0604020202020204" pitchFamily="34" charset="0"/>
-              <a:buChar char="•"/>
-              <a:defRPr kumimoji="1" sz="1800" kern="1200">
-                <a:solidFill>
-                  <a:schemeClr val="tx1"/>
-                </a:solidFill>
-                <a:latin typeface="+mn-lt"/>
-                <a:ea typeface="+mn-ea"/>
-                <a:cs typeface="+mn-cs"/>
-              </a:defRPr>
-            </a:lvl9pPr>
-          </a:lstStyle>
-          <a:p>
-            <a:pPr marL="0" indent="0" algn="r">
-              <a:buNone/>
-            </a:pPr>
-            <a:r>
-              <a:rPr lang="en-US" altLang="ja-JP" sz="2400" dirty="0">
-                <a:solidFill>
-                  <a:srgbClr val="000000"/>
-                </a:solidFill>
-                <a:latin typeface="Yu Gothic" panose="020B0400000000000000" pitchFamily="34" charset="-128"/>
-                <a:ea typeface="Yu Gothic" panose="020B0400000000000000" pitchFamily="34" charset="-128"/>
-              </a:rPr>
-              <a:t>※p</a:t>
-            </a:r>
-            <a:r>
-              <a:rPr lang="ja-JP" altLang="en-US" sz="2400">
-                <a:solidFill>
-                  <a:srgbClr val="000000"/>
-                </a:solidFill>
-                <a:latin typeface="Yu Gothic" panose="020B0400000000000000" pitchFamily="34" charset="-128"/>
-                <a:ea typeface="Yu Gothic" panose="020B0400000000000000" pitchFamily="34" charset="-128"/>
-              </a:rPr>
-              <a:t>：人口</a:t>
-            </a:r>
-            <a:r>
-              <a:rPr lang="en-US" altLang="ja-JP" sz="2400" dirty="0">
-                <a:solidFill>
-                  <a:srgbClr val="000000"/>
-                </a:solidFill>
-                <a:latin typeface="Yu Gothic" panose="020B0400000000000000" pitchFamily="34" charset="-128"/>
-                <a:ea typeface="Yu Gothic" panose="020B0400000000000000" pitchFamily="34" charset="-128"/>
-              </a:rPr>
-              <a:t>1</a:t>
-            </a:r>
-            <a:r>
-              <a:rPr lang="ja-JP" altLang="en-US" sz="2400">
-                <a:solidFill>
-                  <a:srgbClr val="000000"/>
-                </a:solidFill>
-                <a:latin typeface="Yu Gothic" panose="020B0400000000000000" pitchFamily="34" charset="-128"/>
-                <a:ea typeface="Yu Gothic" panose="020B0400000000000000" pitchFamily="34" charset="-128"/>
-              </a:rPr>
-              <a:t>人あたり</a:t>
-            </a:r>
-            <a:endParaRPr lang="en-US" altLang="ja-JP" sz="2400" dirty="0">
-              <a:latin typeface="Yu Gothic" panose="020B0400000000000000" pitchFamily="34" charset="-128"/>
-              <a:ea typeface="Yu Gothic" panose="020B0400000000000000" pitchFamily="34" charset="-128"/>
-            </a:endParaRPr>
+            <a:endParaRPr lang="en-US" altLang="ja-JP" sz="2400" dirty="0"/>
           </a:p>
         </p:txBody>
       </p:sp>
@@ -7474,570 +7194,12 @@
             <p:ph idx="1"/>
           </p:nvPr>
         </p:nvSpPr>
-        <p:spPr>
-          <a:xfrm>
-            <a:off x="2640330" y="2210753"/>
-            <a:ext cx="6911340" cy="826135"/>
-          </a:xfrm>
-          <a:ln>
-            <a:solidFill>
-              <a:schemeClr val="tx1"/>
-            </a:solidFill>
-          </a:ln>
-        </p:spPr>
-        <p:txBody>
-          <a:bodyPr anchor="ctr">
-            <a:normAutofit/>
-          </a:bodyPr>
+        <p:spPr/>
+        <p:txBody>
+          <a:bodyPr/>
           <a:lstStyle/>
           <a:p>
-            <a:pPr marL="0" indent="0" algn="ctr">
-              <a:buNone/>
-            </a:pPr>
-            <a:r>
-              <a:rPr kumimoji="1" lang="ja-JP" altLang="en-US"/>
-              <a:t>関係のありそうな説明変数を含めて分析</a:t>
-            </a:r>
-          </a:p>
-        </p:txBody>
-      </p:sp>
-      <p:sp>
-        <p:nvSpPr>
-          <p:cNvPr id="4" name="コンテンツ プレースホルダー 2">
-            <a:extLst>
-              <a:ext uri="{FF2B5EF4-FFF2-40B4-BE49-F238E27FC236}">
-                <a16:creationId xmlns:a16="http://schemas.microsoft.com/office/drawing/2014/main" id="{80A0A63F-02F7-75BC-0C4C-6AAB613A47C9}"/>
-              </a:ext>
-            </a:extLst>
-          </p:cNvPr>
-          <p:cNvSpPr txBox="1">
-            <a:spLocks/>
-          </p:cNvSpPr>
-          <p:nvPr/>
-        </p:nvSpPr>
-        <p:spPr>
-          <a:xfrm>
-            <a:off x="2640330" y="4318586"/>
-            <a:ext cx="6911340" cy="826135"/>
-          </a:xfrm>
-          <a:prstGeom prst="rect">
-            <a:avLst/>
-          </a:prstGeom>
-          <a:ln>
-            <a:solidFill>
-              <a:schemeClr val="tx1"/>
-            </a:solidFill>
-          </a:ln>
-        </p:spPr>
-        <p:txBody>
-          <a:bodyPr vert="horz" lIns="91440" tIns="45720" rIns="91440" bIns="45720" rtlCol="0" anchor="ctr">
-            <a:normAutofit/>
-          </a:bodyPr>
-          <a:lstStyle>
-            <a:lvl1pPr marL="228600" indent="-228600" algn="l" defTabSz="914400" rtl="0" eaLnBrk="1" latinLnBrk="0" hangingPunct="1">
-              <a:lnSpc>
-                <a:spcPct val="90000"/>
-              </a:lnSpc>
-              <a:spcBef>
-                <a:spcPts val="1000"/>
-              </a:spcBef>
-              <a:buFont typeface="Arial" panose="020B0604020202020204" pitchFamily="34" charset="0"/>
-              <a:buChar char="•"/>
-              <a:defRPr kumimoji="1" sz="2800" kern="1200">
-                <a:solidFill>
-                  <a:schemeClr val="tx1"/>
-                </a:solidFill>
-                <a:latin typeface="+mn-lt"/>
-                <a:ea typeface="+mn-ea"/>
-                <a:cs typeface="+mn-cs"/>
-              </a:defRPr>
-            </a:lvl1pPr>
-            <a:lvl2pPr marL="685800" indent="-228600" algn="l" defTabSz="914400" rtl="0" eaLnBrk="1" latinLnBrk="0" hangingPunct="1">
-              <a:lnSpc>
-                <a:spcPct val="90000"/>
-              </a:lnSpc>
-              <a:spcBef>
-                <a:spcPts val="500"/>
-              </a:spcBef>
-              <a:buFont typeface="Arial" panose="020B0604020202020204" pitchFamily="34" charset="0"/>
-              <a:buChar char="•"/>
-              <a:defRPr kumimoji="1" sz="2400" kern="1200">
-                <a:solidFill>
-                  <a:schemeClr val="tx1"/>
-                </a:solidFill>
-                <a:latin typeface="+mn-lt"/>
-                <a:ea typeface="+mn-ea"/>
-                <a:cs typeface="+mn-cs"/>
-              </a:defRPr>
-            </a:lvl2pPr>
-            <a:lvl3pPr marL="1143000" indent="-228600" algn="l" defTabSz="914400" rtl="0" eaLnBrk="1" latinLnBrk="0" hangingPunct="1">
-              <a:lnSpc>
-                <a:spcPct val="90000"/>
-              </a:lnSpc>
-              <a:spcBef>
-                <a:spcPts val="500"/>
-              </a:spcBef>
-              <a:buFont typeface="Arial" panose="020B0604020202020204" pitchFamily="34" charset="0"/>
-              <a:buChar char="•"/>
-              <a:defRPr kumimoji="1" sz="2000" kern="1200">
-                <a:solidFill>
-                  <a:schemeClr val="tx1"/>
-                </a:solidFill>
-                <a:latin typeface="+mn-lt"/>
-                <a:ea typeface="+mn-ea"/>
-                <a:cs typeface="+mn-cs"/>
-              </a:defRPr>
-            </a:lvl3pPr>
-            <a:lvl4pPr marL="1600200" indent="-228600" algn="l" defTabSz="914400" rtl="0" eaLnBrk="1" latinLnBrk="0" hangingPunct="1">
-              <a:lnSpc>
-                <a:spcPct val="90000"/>
-              </a:lnSpc>
-              <a:spcBef>
-                <a:spcPts val="500"/>
-              </a:spcBef>
-              <a:buFont typeface="Arial" panose="020B0604020202020204" pitchFamily="34" charset="0"/>
-              <a:buChar char="•"/>
-              <a:defRPr kumimoji="1" sz="1800" kern="1200">
-                <a:solidFill>
-                  <a:schemeClr val="tx1"/>
-                </a:solidFill>
-                <a:latin typeface="+mn-lt"/>
-                <a:ea typeface="+mn-ea"/>
-                <a:cs typeface="+mn-cs"/>
-              </a:defRPr>
-            </a:lvl4pPr>
-            <a:lvl5pPr marL="2057400" indent="-228600" algn="l" defTabSz="914400" rtl="0" eaLnBrk="1" latinLnBrk="0" hangingPunct="1">
-              <a:lnSpc>
-                <a:spcPct val="90000"/>
-              </a:lnSpc>
-              <a:spcBef>
-                <a:spcPts val="500"/>
-              </a:spcBef>
-              <a:buFont typeface="Arial" panose="020B0604020202020204" pitchFamily="34" charset="0"/>
-              <a:buChar char="•"/>
-              <a:defRPr kumimoji="1" sz="1800" kern="1200">
-                <a:solidFill>
-                  <a:schemeClr val="tx1"/>
-                </a:solidFill>
-                <a:latin typeface="+mn-lt"/>
-                <a:ea typeface="+mn-ea"/>
-                <a:cs typeface="+mn-cs"/>
-              </a:defRPr>
-            </a:lvl5pPr>
-            <a:lvl6pPr marL="2514600" indent="-228600" algn="l" defTabSz="914400" rtl="0" eaLnBrk="1" latinLnBrk="0" hangingPunct="1">
-              <a:lnSpc>
-                <a:spcPct val="90000"/>
-              </a:lnSpc>
-              <a:spcBef>
-                <a:spcPts val="500"/>
-              </a:spcBef>
-              <a:buFont typeface="Arial" panose="020B0604020202020204" pitchFamily="34" charset="0"/>
-              <a:buChar char="•"/>
-              <a:defRPr kumimoji="1" sz="1800" kern="1200">
-                <a:solidFill>
-                  <a:schemeClr val="tx1"/>
-                </a:solidFill>
-                <a:latin typeface="+mn-lt"/>
-                <a:ea typeface="+mn-ea"/>
-                <a:cs typeface="+mn-cs"/>
-              </a:defRPr>
-            </a:lvl6pPr>
-            <a:lvl7pPr marL="2971800" indent="-228600" algn="l" defTabSz="914400" rtl="0" eaLnBrk="1" latinLnBrk="0" hangingPunct="1">
-              <a:lnSpc>
-                <a:spcPct val="90000"/>
-              </a:lnSpc>
-              <a:spcBef>
-                <a:spcPts val="500"/>
-              </a:spcBef>
-              <a:buFont typeface="Arial" panose="020B0604020202020204" pitchFamily="34" charset="0"/>
-              <a:buChar char="•"/>
-              <a:defRPr kumimoji="1" sz="1800" kern="1200">
-                <a:solidFill>
-                  <a:schemeClr val="tx1"/>
-                </a:solidFill>
-                <a:latin typeface="+mn-lt"/>
-                <a:ea typeface="+mn-ea"/>
-                <a:cs typeface="+mn-cs"/>
-              </a:defRPr>
-            </a:lvl7pPr>
-            <a:lvl8pPr marL="3429000" indent="-228600" algn="l" defTabSz="914400" rtl="0" eaLnBrk="1" latinLnBrk="0" hangingPunct="1">
-              <a:lnSpc>
-                <a:spcPct val="90000"/>
-              </a:lnSpc>
-              <a:spcBef>
-                <a:spcPts val="500"/>
-              </a:spcBef>
-              <a:buFont typeface="Arial" panose="020B0604020202020204" pitchFamily="34" charset="0"/>
-              <a:buChar char="•"/>
-              <a:defRPr kumimoji="1" sz="1800" kern="1200">
-                <a:solidFill>
-                  <a:schemeClr val="tx1"/>
-                </a:solidFill>
-                <a:latin typeface="+mn-lt"/>
-                <a:ea typeface="+mn-ea"/>
-                <a:cs typeface="+mn-cs"/>
-              </a:defRPr>
-            </a:lvl8pPr>
-            <a:lvl9pPr marL="3886200" indent="-228600" algn="l" defTabSz="914400" rtl="0" eaLnBrk="1" latinLnBrk="0" hangingPunct="1">
-              <a:lnSpc>
-                <a:spcPct val="90000"/>
-              </a:lnSpc>
-              <a:spcBef>
-                <a:spcPts val="500"/>
-              </a:spcBef>
-              <a:buFont typeface="Arial" panose="020B0604020202020204" pitchFamily="34" charset="0"/>
-              <a:buChar char="•"/>
-              <a:defRPr kumimoji="1" sz="1800" kern="1200">
-                <a:solidFill>
-                  <a:schemeClr val="tx1"/>
-                </a:solidFill>
-                <a:latin typeface="+mn-lt"/>
-                <a:ea typeface="+mn-ea"/>
-                <a:cs typeface="+mn-cs"/>
-              </a:defRPr>
-            </a:lvl9pPr>
-          </a:lstStyle>
-          <a:p>
-            <a:pPr marL="0" indent="0" algn="ctr">
-              <a:buFont typeface="Arial" panose="020B0604020202020204" pitchFamily="34" charset="0"/>
-              <a:buNone/>
-            </a:pPr>
-            <a:r>
-              <a:rPr lang="ja-JP" altLang="en-US"/>
-              <a:t>結果を見て，相関の低い説明変数を消す</a:t>
-            </a:r>
-          </a:p>
-        </p:txBody>
-      </p:sp>
-      <p:sp>
-        <p:nvSpPr>
-          <p:cNvPr id="6" name="曲折矢印 5">
-            <a:extLst>
-              <a:ext uri="{FF2B5EF4-FFF2-40B4-BE49-F238E27FC236}">
-                <a16:creationId xmlns:a16="http://schemas.microsoft.com/office/drawing/2014/main" id="{EBFE7238-4BA3-2AAB-971D-62E9A01D5F0B}"/>
-              </a:ext>
-            </a:extLst>
-          </p:cNvPr>
-          <p:cNvSpPr/>
-          <p:nvPr/>
-        </p:nvSpPr>
-        <p:spPr>
-          <a:xfrm rot="8100000">
-            <a:off x="6287390" y="3273976"/>
-            <a:ext cx="844062" cy="890954"/>
-          </a:xfrm>
-          <a:prstGeom prst="bentArrow">
-            <a:avLst/>
-          </a:prstGeom>
-        </p:spPr>
-        <p:style>
-          <a:lnRef idx="2">
-            <a:schemeClr val="accent1">
-              <a:shade val="15000"/>
-            </a:schemeClr>
-          </a:lnRef>
-          <a:fillRef idx="1">
-            <a:schemeClr val="accent1"/>
-          </a:fillRef>
-          <a:effectRef idx="0">
-            <a:schemeClr val="accent1"/>
-          </a:effectRef>
-          <a:fontRef idx="minor">
-            <a:schemeClr val="lt1"/>
-          </a:fontRef>
-        </p:style>
-        <p:txBody>
-          <a:bodyPr rtlCol="0" anchor="ctr"/>
-          <a:lstStyle/>
-          <a:p>
-            <a:pPr algn="ctr"/>
-            <a:endParaRPr kumimoji="1" lang="ja-JP" altLang="en-US">
-              <a:solidFill>
-                <a:schemeClr val="tx1"/>
-              </a:solidFill>
-            </a:endParaRPr>
-          </a:p>
-        </p:txBody>
-      </p:sp>
-      <p:sp>
-        <p:nvSpPr>
-          <p:cNvPr id="7" name="曲折矢印 6">
-            <a:extLst>
-              <a:ext uri="{FF2B5EF4-FFF2-40B4-BE49-F238E27FC236}">
-                <a16:creationId xmlns:a16="http://schemas.microsoft.com/office/drawing/2014/main" id="{1D5ED781-D534-F420-FE73-CB71090ED591}"/>
-              </a:ext>
-            </a:extLst>
-          </p:cNvPr>
-          <p:cNvSpPr/>
-          <p:nvPr/>
-        </p:nvSpPr>
-        <p:spPr>
-          <a:xfrm rot="8100000" flipH="1" flipV="1">
-            <a:off x="5060548" y="3190544"/>
-            <a:ext cx="844062" cy="890954"/>
-          </a:xfrm>
-          <a:prstGeom prst="bentArrow">
-            <a:avLst/>
-          </a:prstGeom>
-        </p:spPr>
-        <p:style>
-          <a:lnRef idx="2">
-            <a:schemeClr val="accent1">
-              <a:shade val="15000"/>
-            </a:schemeClr>
-          </a:lnRef>
-          <a:fillRef idx="1">
-            <a:schemeClr val="accent1"/>
-          </a:fillRef>
-          <a:effectRef idx="0">
-            <a:schemeClr val="accent1"/>
-          </a:effectRef>
-          <a:fontRef idx="minor">
-            <a:schemeClr val="lt1"/>
-          </a:fontRef>
-        </p:style>
-        <p:txBody>
-          <a:bodyPr rtlCol="0" anchor="ctr"/>
-          <a:lstStyle/>
-          <a:p>
-            <a:pPr algn="ctr"/>
-            <a:endParaRPr kumimoji="1" lang="ja-JP" altLang="en-US">
-              <a:solidFill>
-                <a:schemeClr val="tx1"/>
-              </a:solidFill>
-            </a:endParaRPr>
-          </a:p>
-        </p:txBody>
-      </p:sp>
-      <p:sp>
-        <p:nvSpPr>
-          <p:cNvPr id="9" name="コンテンツ プレースホルダー 2">
-            <a:extLst>
-              <a:ext uri="{FF2B5EF4-FFF2-40B4-BE49-F238E27FC236}">
-                <a16:creationId xmlns:a16="http://schemas.microsoft.com/office/drawing/2014/main" id="{02E72988-66AB-DEF3-52FC-44B90D69C521}"/>
-              </a:ext>
-            </a:extLst>
-          </p:cNvPr>
-          <p:cNvSpPr txBox="1">
-            <a:spLocks/>
-          </p:cNvSpPr>
-          <p:nvPr/>
-        </p:nvSpPr>
-        <p:spPr>
-          <a:xfrm>
-            <a:off x="1729493" y="5745382"/>
-            <a:ext cx="8733014" cy="681037"/>
-          </a:xfrm>
-          <a:prstGeom prst="rect">
-            <a:avLst/>
-          </a:prstGeom>
-        </p:spPr>
-        <p:txBody>
-          <a:bodyPr vert="horz" lIns="91440" tIns="45720" rIns="91440" bIns="45720" rtlCol="0">
-            <a:normAutofit/>
-          </a:bodyPr>
-          <a:lstStyle>
-            <a:lvl1pPr marL="228600" indent="-228600" algn="l" defTabSz="914400" rtl="0" eaLnBrk="1" latinLnBrk="0" hangingPunct="1">
-              <a:lnSpc>
-                <a:spcPct val="90000"/>
-              </a:lnSpc>
-              <a:spcBef>
-                <a:spcPts val="1000"/>
-              </a:spcBef>
-              <a:buFont typeface="Arial" panose="020B0604020202020204" pitchFamily="34" charset="0"/>
-              <a:buChar char="•"/>
-              <a:defRPr kumimoji="1" sz="2800" kern="1200">
-                <a:solidFill>
-                  <a:schemeClr val="tx1"/>
-                </a:solidFill>
-                <a:latin typeface="+mn-lt"/>
-                <a:ea typeface="+mn-ea"/>
-                <a:cs typeface="+mn-cs"/>
-              </a:defRPr>
-            </a:lvl1pPr>
-            <a:lvl2pPr marL="685800" indent="-228600" algn="l" defTabSz="914400" rtl="0" eaLnBrk="1" latinLnBrk="0" hangingPunct="1">
-              <a:lnSpc>
-                <a:spcPct val="90000"/>
-              </a:lnSpc>
-              <a:spcBef>
-                <a:spcPts val="500"/>
-              </a:spcBef>
-              <a:buFont typeface="Arial" panose="020B0604020202020204" pitchFamily="34" charset="0"/>
-              <a:buChar char="•"/>
-              <a:defRPr kumimoji="1" sz="2400" kern="1200">
-                <a:solidFill>
-                  <a:schemeClr val="tx1"/>
-                </a:solidFill>
-                <a:latin typeface="+mn-lt"/>
-                <a:ea typeface="+mn-ea"/>
-                <a:cs typeface="+mn-cs"/>
-              </a:defRPr>
-            </a:lvl2pPr>
-            <a:lvl3pPr marL="1143000" indent="-228600" algn="l" defTabSz="914400" rtl="0" eaLnBrk="1" latinLnBrk="0" hangingPunct="1">
-              <a:lnSpc>
-                <a:spcPct val="90000"/>
-              </a:lnSpc>
-              <a:spcBef>
-                <a:spcPts val="500"/>
-              </a:spcBef>
-              <a:buFont typeface="Arial" panose="020B0604020202020204" pitchFamily="34" charset="0"/>
-              <a:buChar char="•"/>
-              <a:defRPr kumimoji="1" sz="2000" kern="1200">
-                <a:solidFill>
-                  <a:schemeClr val="tx1"/>
-                </a:solidFill>
-                <a:latin typeface="+mn-lt"/>
-                <a:ea typeface="+mn-ea"/>
-                <a:cs typeface="+mn-cs"/>
-              </a:defRPr>
-            </a:lvl3pPr>
-            <a:lvl4pPr marL="1600200" indent="-228600" algn="l" defTabSz="914400" rtl="0" eaLnBrk="1" latinLnBrk="0" hangingPunct="1">
-              <a:lnSpc>
-                <a:spcPct val="90000"/>
-              </a:lnSpc>
-              <a:spcBef>
-                <a:spcPts val="500"/>
-              </a:spcBef>
-              <a:buFont typeface="Arial" panose="020B0604020202020204" pitchFamily="34" charset="0"/>
-              <a:buChar char="•"/>
-              <a:defRPr kumimoji="1" sz="1800" kern="1200">
-                <a:solidFill>
-                  <a:schemeClr val="tx1"/>
-                </a:solidFill>
-                <a:latin typeface="+mn-lt"/>
-                <a:ea typeface="+mn-ea"/>
-                <a:cs typeface="+mn-cs"/>
-              </a:defRPr>
-            </a:lvl4pPr>
-            <a:lvl5pPr marL="2057400" indent="-228600" algn="l" defTabSz="914400" rtl="0" eaLnBrk="1" latinLnBrk="0" hangingPunct="1">
-              <a:lnSpc>
-                <a:spcPct val="90000"/>
-              </a:lnSpc>
-              <a:spcBef>
-                <a:spcPts val="500"/>
-              </a:spcBef>
-              <a:buFont typeface="Arial" panose="020B0604020202020204" pitchFamily="34" charset="0"/>
-              <a:buChar char="•"/>
-              <a:defRPr kumimoji="1" sz="1800" kern="1200">
-                <a:solidFill>
-                  <a:schemeClr val="tx1"/>
-                </a:solidFill>
-                <a:latin typeface="+mn-lt"/>
-                <a:ea typeface="+mn-ea"/>
-                <a:cs typeface="+mn-cs"/>
-              </a:defRPr>
-            </a:lvl5pPr>
-            <a:lvl6pPr marL="2514600" indent="-228600" algn="l" defTabSz="914400" rtl="0" eaLnBrk="1" latinLnBrk="0" hangingPunct="1">
-              <a:lnSpc>
-                <a:spcPct val="90000"/>
-              </a:lnSpc>
-              <a:spcBef>
-                <a:spcPts val="500"/>
-              </a:spcBef>
-              <a:buFont typeface="Arial" panose="020B0604020202020204" pitchFamily="34" charset="0"/>
-              <a:buChar char="•"/>
-              <a:defRPr kumimoji="1" sz="1800" kern="1200">
-                <a:solidFill>
-                  <a:schemeClr val="tx1"/>
-                </a:solidFill>
-                <a:latin typeface="+mn-lt"/>
-                <a:ea typeface="+mn-ea"/>
-                <a:cs typeface="+mn-cs"/>
-              </a:defRPr>
-            </a:lvl6pPr>
-            <a:lvl7pPr marL="2971800" indent="-228600" algn="l" defTabSz="914400" rtl="0" eaLnBrk="1" latinLnBrk="0" hangingPunct="1">
-              <a:lnSpc>
-                <a:spcPct val="90000"/>
-              </a:lnSpc>
-              <a:spcBef>
-                <a:spcPts val="500"/>
-              </a:spcBef>
-              <a:buFont typeface="Arial" panose="020B0604020202020204" pitchFamily="34" charset="0"/>
-              <a:buChar char="•"/>
-              <a:defRPr kumimoji="1" sz="1800" kern="1200">
-                <a:solidFill>
-                  <a:schemeClr val="tx1"/>
-                </a:solidFill>
-                <a:latin typeface="+mn-lt"/>
-                <a:ea typeface="+mn-ea"/>
-                <a:cs typeface="+mn-cs"/>
-              </a:defRPr>
-            </a:lvl7pPr>
-            <a:lvl8pPr marL="3429000" indent="-228600" algn="l" defTabSz="914400" rtl="0" eaLnBrk="1" latinLnBrk="0" hangingPunct="1">
-              <a:lnSpc>
-                <a:spcPct val="90000"/>
-              </a:lnSpc>
-              <a:spcBef>
-                <a:spcPts val="500"/>
-              </a:spcBef>
-              <a:buFont typeface="Arial" panose="020B0604020202020204" pitchFamily="34" charset="0"/>
-              <a:buChar char="•"/>
-              <a:defRPr kumimoji="1" sz="1800" kern="1200">
-                <a:solidFill>
-                  <a:schemeClr val="tx1"/>
-                </a:solidFill>
-                <a:latin typeface="+mn-lt"/>
-                <a:ea typeface="+mn-ea"/>
-                <a:cs typeface="+mn-cs"/>
-              </a:defRPr>
-            </a:lvl8pPr>
-            <a:lvl9pPr marL="3886200" indent="-228600" algn="l" defTabSz="914400" rtl="0" eaLnBrk="1" latinLnBrk="0" hangingPunct="1">
-              <a:lnSpc>
-                <a:spcPct val="90000"/>
-              </a:lnSpc>
-              <a:spcBef>
-                <a:spcPts val="500"/>
-              </a:spcBef>
-              <a:buFont typeface="Arial" panose="020B0604020202020204" pitchFamily="34" charset="0"/>
-              <a:buChar char="•"/>
-              <a:defRPr kumimoji="1" sz="1800" kern="1200">
-                <a:solidFill>
-                  <a:schemeClr val="tx1"/>
-                </a:solidFill>
-                <a:latin typeface="+mn-lt"/>
-                <a:ea typeface="+mn-ea"/>
-                <a:cs typeface="+mn-cs"/>
-              </a:defRPr>
-            </a:lvl9pPr>
-          </a:lstStyle>
-          <a:p>
-            <a:pPr marL="0" indent="0" algn="ctr">
-              <a:buNone/>
-            </a:pPr>
-            <a:r>
-              <a:rPr lang="ja-JP" altLang="en-US">
-                <a:solidFill>
-                  <a:srgbClr val="000000"/>
-                </a:solidFill>
-                <a:latin typeface="Yu Gothic" panose="020B0400000000000000" pitchFamily="34" charset="-128"/>
-                <a:ea typeface="Yu Gothic" panose="020B0400000000000000" pitchFamily="34" charset="-128"/>
-              </a:rPr>
-              <a:t>→最終的に計</a:t>
-            </a:r>
-            <a:r>
-              <a:rPr lang="en-US" altLang="ja-JP" dirty="0">
-                <a:solidFill>
-                  <a:srgbClr val="000000"/>
-                </a:solidFill>
-                <a:latin typeface="Yu Gothic" panose="020B0400000000000000" pitchFamily="34" charset="-128"/>
-                <a:ea typeface="Yu Gothic" panose="020B0400000000000000" pitchFamily="34" charset="-128"/>
-              </a:rPr>
-              <a:t>54</a:t>
-            </a:r>
-            <a:r>
-              <a:rPr lang="ja-JP" altLang="en-US">
-                <a:solidFill>
-                  <a:srgbClr val="000000"/>
-                </a:solidFill>
-                <a:latin typeface="Yu Gothic" panose="020B0400000000000000" pitchFamily="34" charset="-128"/>
-                <a:ea typeface="Yu Gothic" panose="020B0400000000000000" pitchFamily="34" charset="-128"/>
-              </a:rPr>
-              <a:t>回の重回帰分析を試行</a:t>
-            </a:r>
-            <a:endParaRPr lang="en-US" altLang="ja-JP" dirty="0">
-              <a:latin typeface="Yu Gothic" panose="020B0400000000000000" pitchFamily="34" charset="-128"/>
-              <a:ea typeface="Yu Gothic" panose="020B0400000000000000" pitchFamily="34" charset="-128"/>
-            </a:endParaRPr>
+            <a:endParaRPr kumimoji="1" lang="ja-JP" altLang="en-US"/>
           </a:p>
         </p:txBody>
       </p:sp>
